--- a/tmp_pptx/NEW_PPT.pptx
+++ b/tmp_pptx/NEW_PPT.pptx
@@ -23,8 +23,8 @@
     <p:sldId id="267" r:id="rId14"/>
     <p:sldId id="268" r:id="rId15"/>
     <p:sldId id="269" r:id="rId16"/>
-    <p:sldId id="270" r:id="rId17"/>
-    <p:sldId id="271" r:id="rId18"/>
+    <p:sldId id="271" r:id="rId17"/>
+    <p:sldId id="278" r:id="rId18"/>
     <p:sldId id="273" r:id="rId19"/>
     <p:sldId id="274" r:id="rId20"/>
     <p:sldId id="275" r:id="rId21"/>
@@ -136,7 +136,7 @@
 <file path=ppt/revisionInfo.xml><?xml version="1.0" encoding="utf-8"?>
 <p1510:revInfo xmlns:a="http://schemas.openxmlformats.org/drawingml/2006/main" xmlns:r="http://schemas.openxmlformats.org/officeDocument/2006/relationships" xmlns:p1510="http://schemas.microsoft.com/office/powerpoint/2015/10/main">
   <p1510:revLst>
-    <p1510:client id="{AC66E5FA-A9FA-447A-8FC8-6B5EA3E72A26}" v="1" dt="2026-03-24T19:32:31.129"/>
+    <p1510:client id="{AC66E5FA-A9FA-447A-8FC8-6B5EA3E72A26}" v="7" dt="2026-03-26T14:36:58.046"/>
   </p1510:revLst>
 </p1510:revInfo>
 </file>
@@ -145,17 +145,25 @@
 <pc:chgInfo xmlns:a="http://schemas.openxmlformats.org/drawingml/2006/main" xmlns:r="http://schemas.openxmlformats.org/officeDocument/2006/relationships" xmlns:ac="http://schemas.microsoft.com/office/drawing/2013/main/command" xmlns:pc="http://schemas.microsoft.com/office/powerpoint/2013/main/command">
   <pc:docChgLst>
     <pc:chgData name="mohammad mojahid" userId="4c1afb2c5ebc34fe" providerId="LiveId" clId="{16CDDD25-34FF-4A34-888C-2A1A2DC70C03}"/>
-    <pc:docChg chg="undo redo custSel modSld sldOrd">
-      <pc:chgData name="mohammad mojahid" userId="4c1afb2c5ebc34fe" providerId="LiveId" clId="{16CDDD25-34FF-4A34-888C-2A1A2DC70C03}" dt="2026-03-26T13:40:27.257" v="230" actId="1076"/>
+    <pc:docChg chg="undo redo custSel addSld delSld modSld sldOrd">
+      <pc:chgData name="mohammad mojahid" userId="4c1afb2c5ebc34fe" providerId="LiveId" clId="{16CDDD25-34FF-4A34-888C-2A1A2DC70C03}" dt="2026-03-26T15:30:20.392" v="559" actId="1076"/>
       <pc:docMkLst>
         <pc:docMk/>
       </pc:docMkLst>
-      <pc:sldChg chg="modSp mod">
-        <pc:chgData name="mohammad mojahid" userId="4c1afb2c5ebc34fe" providerId="LiveId" clId="{16CDDD25-34FF-4A34-888C-2A1A2DC70C03}" dt="2026-03-24T19:33:10.594" v="140" actId="20577"/>
+      <pc:sldChg chg="addSp delSp modSp mod">
+        <pc:chgData name="mohammad mojahid" userId="4c1afb2c5ebc34fe" providerId="LiveId" clId="{16CDDD25-34FF-4A34-888C-2A1A2DC70C03}" dt="2026-03-26T15:30:20.392" v="559" actId="1076"/>
         <pc:sldMkLst>
           <pc:docMk/>
           <pc:sldMk cId="0" sldId="256"/>
         </pc:sldMkLst>
+        <pc:spChg chg="mod">
+          <ac:chgData name="mohammad mojahid" userId="4c1afb2c5ebc34fe" providerId="LiveId" clId="{16CDDD25-34FF-4A34-888C-2A1A2DC70C03}" dt="2026-03-26T14:20:50.116" v="291" actId="20577"/>
+          <ac:spMkLst>
+            <pc:docMk/>
+            <pc:sldMk cId="0" sldId="256"/>
+            <ac:spMk id="2" creationId="{00000000-0000-0000-0000-000000000000}"/>
+          </ac:spMkLst>
+        </pc:spChg>
         <pc:spChg chg="mod">
           <ac:chgData name="mohammad mojahid" userId="4c1afb2c5ebc34fe" providerId="LiveId" clId="{16CDDD25-34FF-4A34-888C-2A1A2DC70C03}" dt="2026-03-24T19:33:10.594" v="140" actId="20577"/>
           <ac:spMkLst>
@@ -180,9 +188,33 @@
             <ac:spMk id="14" creationId="{00000000-0000-0000-0000-000000000000}"/>
           </ac:spMkLst>
         </pc:spChg>
+        <pc:spChg chg="mod">
+          <ac:chgData name="mohammad mojahid" userId="4c1afb2c5ebc34fe" providerId="LiveId" clId="{16CDDD25-34FF-4A34-888C-2A1A2DC70C03}" dt="2026-03-26T15:22:25.914" v="552" actId="20577"/>
+          <ac:spMkLst>
+            <pc:docMk/>
+            <pc:sldMk cId="0" sldId="256"/>
+            <ac:spMk id="15" creationId="{00000000-0000-0000-0000-000000000000}"/>
+          </ac:spMkLst>
+        </pc:spChg>
+        <pc:spChg chg="add del">
+          <ac:chgData name="mohammad mojahid" userId="4c1afb2c5ebc34fe" providerId="LiveId" clId="{16CDDD25-34FF-4A34-888C-2A1A2DC70C03}" dt="2026-03-26T14:24:44.312" v="293" actId="478"/>
+          <ac:spMkLst>
+            <pc:docMk/>
+            <pc:sldMk cId="0" sldId="256"/>
+            <ac:spMk id="18" creationId="{531A6911-AF0A-AB28-581A-993B1E56D75D}"/>
+          </ac:spMkLst>
+        </pc:spChg>
+        <pc:spChg chg="add mod">
+          <ac:chgData name="mohammad mojahid" userId="4c1afb2c5ebc34fe" providerId="LiveId" clId="{16CDDD25-34FF-4A34-888C-2A1A2DC70C03}" dt="2026-03-26T15:30:20.392" v="559" actId="1076"/>
+          <ac:spMkLst>
+            <pc:docMk/>
+            <pc:sldMk cId="0" sldId="256"/>
+            <ac:spMk id="19" creationId="{2B204196-8898-02A9-881A-67F25D7D2A60}"/>
+          </ac:spMkLst>
+        </pc:spChg>
       </pc:sldChg>
       <pc:sldChg chg="modSp mod">
-        <pc:chgData name="mohammad mojahid" userId="4c1afb2c5ebc34fe" providerId="LiveId" clId="{16CDDD25-34FF-4A34-888C-2A1A2DC70C03}" dt="2026-03-24T19:33:48.689" v="169" actId="20577"/>
+        <pc:chgData name="mohammad mojahid" userId="4c1afb2c5ebc34fe" providerId="LiveId" clId="{16CDDD25-34FF-4A34-888C-2A1A2DC70C03}" dt="2026-03-26T14:37:18.504" v="539" actId="20577"/>
         <pc:sldMkLst>
           <pc:docMk/>
           <pc:sldMk cId="0" sldId="257"/>
@@ -195,6 +227,45 @@
             <ac:spMk id="20" creationId="{00000000-0000-0000-0000-000000000000}"/>
           </ac:spMkLst>
         </pc:spChg>
+        <pc:spChg chg="mod">
+          <ac:chgData name="mohammad mojahid" userId="4c1afb2c5ebc34fe" providerId="LiveId" clId="{16CDDD25-34FF-4A34-888C-2A1A2DC70C03}" dt="2026-03-26T14:37:18.504" v="539" actId="20577"/>
+          <ac:spMkLst>
+            <pc:docMk/>
+            <pc:sldMk cId="0" sldId="257"/>
+            <ac:spMk id="32" creationId="{00000000-0000-0000-0000-000000000000}"/>
+          </ac:spMkLst>
+        </pc:spChg>
+        <pc:spChg chg="mod">
+          <ac:chgData name="mohammad mojahid" userId="4c1afb2c5ebc34fe" providerId="LiveId" clId="{16CDDD25-34FF-4A34-888C-2A1A2DC70C03}" dt="2026-03-26T14:36:58.046" v="505"/>
+          <ac:spMkLst>
+            <pc:docMk/>
+            <pc:sldMk cId="0" sldId="257"/>
+            <ac:spMk id="36" creationId="{00000000-0000-0000-0000-000000000000}"/>
+          </ac:spMkLst>
+        </pc:spChg>
+        <pc:spChg chg="mod">
+          <ac:chgData name="mohammad mojahid" userId="4c1afb2c5ebc34fe" providerId="LiveId" clId="{16CDDD25-34FF-4A34-888C-2A1A2DC70C03}" dt="2026-03-26T14:36:26.854" v="502" actId="20577"/>
+          <ac:spMkLst>
+            <pc:docMk/>
+            <pc:sldMk cId="0" sldId="257"/>
+            <ac:spMk id="37" creationId="{00000000-0000-0000-0000-000000000000}"/>
+          </ac:spMkLst>
+        </pc:spChg>
+        <pc:spChg chg="mod">
+          <ac:chgData name="mohammad mojahid" userId="4c1afb2c5ebc34fe" providerId="LiveId" clId="{16CDDD25-34FF-4A34-888C-2A1A2DC70C03}" dt="2026-03-26T14:36:45.353" v="504"/>
+          <ac:spMkLst>
+            <pc:docMk/>
+            <pc:sldMk cId="0" sldId="257"/>
+            <ac:spMk id="40" creationId="{00000000-0000-0000-0000-000000000000}"/>
+          </ac:spMkLst>
+        </pc:spChg>
+      </pc:sldChg>
+      <pc:sldChg chg="ord">
+        <pc:chgData name="mohammad mojahid" userId="4c1afb2c5ebc34fe" providerId="LiveId" clId="{16CDDD25-34FF-4A34-888C-2A1A2DC70C03}" dt="2026-03-26T15:30:18.827" v="558" actId="20578"/>
+        <pc:sldMkLst>
+          <pc:docMk/>
+          <pc:sldMk cId="0" sldId="258"/>
+        </pc:sldMkLst>
       </pc:sldChg>
       <pc:sldChg chg="modSp mod">
         <pc:chgData name="mohammad mojahid" userId="4c1afb2c5ebc34fe" providerId="LiveId" clId="{16CDDD25-34FF-4A34-888C-2A1A2DC70C03}" dt="2026-03-26T13:38:09.163" v="222" actId="404"/>
@@ -235,7 +306,7 @@
         </pc:spChg>
       </pc:sldChg>
       <pc:sldChg chg="addSp delSp modSp mod">
-        <pc:chgData name="mohammad mojahid" userId="4c1afb2c5ebc34fe" providerId="LiveId" clId="{16CDDD25-34FF-4A34-888C-2A1A2DC70C03}" dt="2026-03-26T13:40:27.257" v="230" actId="1076"/>
+        <pc:chgData name="mohammad mojahid" userId="4c1afb2c5ebc34fe" providerId="LiveId" clId="{16CDDD25-34FF-4A34-888C-2A1A2DC70C03}" dt="2026-03-26T13:53:20.775" v="264"/>
         <pc:sldMkLst>
           <pc:docMk/>
           <pc:sldMk cId="0" sldId="267"/>
@@ -248,23 +319,115 @@
             <ac:spMk id="11" creationId="{00000000-0000-0000-0000-000000000000}"/>
           </ac:spMkLst>
         </pc:spChg>
-        <pc:picChg chg="add mod">
-          <ac:chgData name="mohammad mojahid" userId="4c1afb2c5ebc34fe" providerId="LiveId" clId="{16CDDD25-34FF-4A34-888C-2A1A2DC70C03}" dt="2026-03-26T13:40:27.257" v="230" actId="1076"/>
+        <pc:picChg chg="add del mod">
+          <ac:chgData name="mohammad mojahid" userId="4c1afb2c5ebc34fe" providerId="LiveId" clId="{16CDDD25-34FF-4A34-888C-2A1A2DC70C03}" dt="2026-03-26T13:53:19.037" v="263" actId="478"/>
           <ac:picMkLst>
             <pc:docMk/>
             <pc:sldMk cId="0" sldId="267"/>
             <ac:picMk id="28" creationId="{362BE507-5261-3939-6A7A-767EB347840E}"/>
           </ac:picMkLst>
         </pc:picChg>
+        <pc:picChg chg="add mod">
+          <ac:chgData name="mohammad mojahid" userId="4c1afb2c5ebc34fe" providerId="LiveId" clId="{16CDDD25-34FF-4A34-888C-2A1A2DC70C03}" dt="2026-03-26T13:53:20.775" v="264"/>
+          <ac:picMkLst>
+            <pc:docMk/>
+            <pc:sldMk cId="0" sldId="267"/>
+            <ac:picMk id="29" creationId="{362BE507-5261-3939-6A7A-767EB347840E}"/>
+          </ac:picMkLst>
+        </pc:picChg>
       </pc:sldChg>
-      <pc:sldChg chg="addSp modSp mod ord">
-        <pc:chgData name="mohammad mojahid" userId="4c1afb2c5ebc34fe" providerId="LiveId" clId="{16CDDD25-34FF-4A34-888C-2A1A2DC70C03}" dt="2026-03-24T19:38:50.168" v="193" actId="14100"/>
+      <pc:sldChg chg="addSp delSp modSp mod">
+        <pc:chgData name="mohammad mojahid" userId="4c1afb2c5ebc34fe" providerId="LiveId" clId="{16CDDD25-34FF-4A34-888C-2A1A2DC70C03}" dt="2026-03-26T13:55:33.842" v="275" actId="1076"/>
+        <pc:sldMkLst>
+          <pc:docMk/>
+          <pc:sldMk cId="0" sldId="268"/>
+        </pc:sldMkLst>
+        <pc:spChg chg="mod">
+          <ac:chgData name="mohammad mojahid" userId="4c1afb2c5ebc34fe" providerId="LiveId" clId="{16CDDD25-34FF-4A34-888C-2A1A2DC70C03}" dt="2026-03-26T13:54:25.140" v="267" actId="20577"/>
+          <ac:spMkLst>
+            <pc:docMk/>
+            <pc:sldMk cId="0" sldId="268"/>
+            <ac:spMk id="11" creationId="{00000000-0000-0000-0000-000000000000}"/>
+          </ac:spMkLst>
+        </pc:spChg>
+        <pc:picChg chg="add del">
+          <ac:chgData name="mohammad mojahid" userId="4c1afb2c5ebc34fe" providerId="LiveId" clId="{16CDDD25-34FF-4A34-888C-2A1A2DC70C03}" dt="2026-03-26T13:54:21.667" v="266" actId="478"/>
+          <ac:picMkLst>
+            <pc:docMk/>
+            <pc:sldMk cId="0" sldId="268"/>
+            <ac:picMk id="28" creationId="{8008F27D-718D-A8B7-BBE7-CC24DD3300B2}"/>
+          </ac:picMkLst>
+        </pc:picChg>
+        <pc:picChg chg="add mod">
+          <ac:chgData name="mohammad mojahid" userId="4c1afb2c5ebc34fe" providerId="LiveId" clId="{16CDDD25-34FF-4A34-888C-2A1A2DC70C03}" dt="2026-03-26T13:55:33.842" v="275" actId="1076"/>
+          <ac:picMkLst>
+            <pc:docMk/>
+            <pc:sldMk cId="0" sldId="268"/>
+            <ac:picMk id="30" creationId="{E352B8FB-A212-DF4B-DD4C-2D24462C9937}"/>
+          </ac:picMkLst>
+        </pc:picChg>
+      </pc:sldChg>
+      <pc:sldChg chg="addSp delSp modSp mod">
+        <pc:chgData name="mohammad mojahid" userId="4c1afb2c5ebc34fe" providerId="LiveId" clId="{16CDDD25-34FF-4A34-888C-2A1A2DC70C03}" dt="2026-03-26T14:04:43.501" v="284" actId="1076"/>
+        <pc:sldMkLst>
+          <pc:docMk/>
+          <pc:sldMk cId="0" sldId="269"/>
+        </pc:sldMkLst>
+        <pc:picChg chg="add del mod">
+          <ac:chgData name="mohammad mojahid" userId="4c1afb2c5ebc34fe" providerId="LiveId" clId="{16CDDD25-34FF-4A34-888C-2A1A2DC70C03}" dt="2026-03-26T14:04:06.390" v="279" actId="478"/>
+          <ac:picMkLst>
+            <pc:docMk/>
+            <pc:sldMk cId="0" sldId="269"/>
+            <ac:picMk id="28" creationId="{ED5CA676-3939-7BC0-D651-CFE002CF284F}"/>
+          </ac:picMkLst>
+        </pc:picChg>
+        <pc:picChg chg="add mod">
+          <ac:chgData name="mohammad mojahid" userId="4c1afb2c5ebc34fe" providerId="LiveId" clId="{16CDDD25-34FF-4A34-888C-2A1A2DC70C03}" dt="2026-03-26T14:04:43.501" v="284" actId="1076"/>
+          <ac:picMkLst>
+            <pc:docMk/>
+            <pc:sldMk cId="0" sldId="269"/>
+            <ac:picMk id="30" creationId="{E6A4EE72-959B-70D3-1ABC-F14C7D1B899D}"/>
+          </ac:picMkLst>
+        </pc:picChg>
+      </pc:sldChg>
+      <pc:sldChg chg="del">
+        <pc:chgData name="mohammad mojahid" userId="4c1afb2c5ebc34fe" providerId="LiveId" clId="{16CDDD25-34FF-4A34-888C-2A1A2DC70C03}" dt="2026-03-26T14:35:00.034" v="499" actId="47"/>
+        <pc:sldMkLst>
+          <pc:docMk/>
+          <pc:sldMk cId="0" sldId="270"/>
+        </pc:sldMkLst>
+      </pc:sldChg>
+      <pc:sldChg chg="addSp modSp mod">
+        <pc:chgData name="mohammad mojahid" userId="4c1afb2c5ebc34fe" providerId="LiveId" clId="{16CDDD25-34FF-4A34-888C-2A1A2DC70C03}" dt="2026-03-26T14:08:19.915" v="290" actId="1076"/>
+        <pc:sldMkLst>
+          <pc:docMk/>
+          <pc:sldMk cId="0" sldId="271"/>
+        </pc:sldMkLst>
+        <pc:picChg chg="add mod">
+          <ac:chgData name="mohammad mojahid" userId="4c1afb2c5ebc34fe" providerId="LiveId" clId="{16CDDD25-34FF-4A34-888C-2A1A2DC70C03}" dt="2026-03-26T14:08:19.915" v="290" actId="1076"/>
+          <ac:picMkLst>
+            <pc:docMk/>
+            <pc:sldMk cId="0" sldId="271"/>
+            <ac:picMk id="28" creationId="{DDF7FACF-826F-1054-A64B-0F825AD829F5}"/>
+          </ac:picMkLst>
+        </pc:picChg>
+      </pc:sldChg>
+      <pc:sldChg chg="addSp delSp modSp mod ord">
+        <pc:chgData name="mohammad mojahid" userId="4c1afb2c5ebc34fe" providerId="LiveId" clId="{16CDDD25-34FF-4A34-888C-2A1A2DC70C03}" dt="2026-03-26T13:53:12.957" v="262" actId="478"/>
         <pc:sldMkLst>
           <pc:docMk/>
           <pc:sldMk cId="0" sldId="272"/>
         </pc:sldMkLst>
         <pc:spChg chg="mod">
-          <ac:chgData name="mohammad mojahid" userId="4c1afb2c5ebc34fe" providerId="LiveId" clId="{16CDDD25-34FF-4A34-888C-2A1A2DC70C03}" dt="2026-03-24T19:38:05.099" v="182" actId="1076"/>
+          <ac:chgData name="mohammad mojahid" userId="4c1afb2c5ebc34fe" providerId="LiveId" clId="{16CDDD25-34FF-4A34-888C-2A1A2DC70C03}" dt="2026-03-26T13:52:45.555" v="244" actId="1038"/>
+          <ac:spMkLst>
+            <pc:docMk/>
+            <pc:sldMk cId="0" sldId="272"/>
+            <ac:spMk id="2" creationId="{00000000-0000-0000-0000-000000000000}"/>
+          </ac:spMkLst>
+        </pc:spChg>
+        <pc:spChg chg="mod">
+          <ac:chgData name="mohammad mojahid" userId="4c1afb2c5ebc34fe" providerId="LiveId" clId="{16CDDD25-34FF-4A34-888C-2A1A2DC70C03}" dt="2026-03-26T13:53:12.311" v="261" actId="20577"/>
           <ac:spMkLst>
             <pc:docMk/>
             <pc:sldMk cId="0" sldId="272"/>
@@ -279,14 +442,148 @@
             <ac:spMk id="12" creationId="{00000000-0000-0000-0000-000000000000}"/>
           </ac:spMkLst>
         </pc:spChg>
-        <pc:picChg chg="add mod">
-          <ac:chgData name="mohammad mojahid" userId="4c1afb2c5ebc34fe" providerId="LiveId" clId="{16CDDD25-34FF-4A34-888C-2A1A2DC70C03}" dt="2026-03-24T19:38:50.168" v="193" actId="14100"/>
+        <pc:picChg chg="add del mod">
+          <ac:chgData name="mohammad mojahid" userId="4c1afb2c5ebc34fe" providerId="LiveId" clId="{16CDDD25-34FF-4A34-888C-2A1A2DC70C03}" dt="2026-03-26T13:53:12.957" v="262" actId="478"/>
           <ac:picMkLst>
             <pc:docMk/>
             <pc:sldMk cId="0" sldId="272"/>
             <ac:picMk id="14" creationId="{A4BF76C0-5B6E-A22D-AEDC-DDA515573A86}"/>
           </ac:picMkLst>
         </pc:picChg>
+        <pc:picChg chg="add del mod">
+          <ac:chgData name="mohammad mojahid" userId="4c1afb2c5ebc34fe" providerId="LiveId" clId="{16CDDD25-34FF-4A34-888C-2A1A2DC70C03}" dt="2026-03-26T13:53:11.581" v="260" actId="22"/>
+          <ac:picMkLst>
+            <pc:docMk/>
+            <pc:sldMk cId="0" sldId="272"/>
+            <ac:picMk id="15" creationId="{A91368BD-CA5E-D665-8897-784D6547966C}"/>
+          </ac:picMkLst>
+        </pc:picChg>
+      </pc:sldChg>
+      <pc:sldChg chg="addSp delSp modSp add mod">
+        <pc:chgData name="mohammad mojahid" userId="4c1afb2c5ebc34fe" providerId="LiveId" clId="{16CDDD25-34FF-4A34-888C-2A1A2DC70C03}" dt="2026-03-26T14:34:03.394" v="498" actId="115"/>
+        <pc:sldMkLst>
+          <pc:docMk/>
+          <pc:sldMk cId="2033238563" sldId="278"/>
+        </pc:sldMkLst>
+        <pc:spChg chg="mod">
+          <ac:chgData name="mohammad mojahid" userId="4c1afb2c5ebc34fe" providerId="LiveId" clId="{16CDDD25-34FF-4A34-888C-2A1A2DC70C03}" dt="2026-03-26T14:30:08.446" v="405" actId="20577"/>
+          <ac:spMkLst>
+            <pc:docMk/>
+            <pc:sldMk cId="2033238563" sldId="278"/>
+            <ac:spMk id="7" creationId="{2D5FA05B-B8E1-A042-4B79-A5B6E2E55BFC}"/>
+          </ac:spMkLst>
+        </pc:spChg>
+        <pc:spChg chg="mod">
+          <ac:chgData name="mohammad mojahid" userId="4c1afb2c5ebc34fe" providerId="LiveId" clId="{16CDDD25-34FF-4A34-888C-2A1A2DC70C03}" dt="2026-03-26T14:30:25.126" v="437" actId="20577"/>
+          <ac:spMkLst>
+            <pc:docMk/>
+            <pc:sldMk cId="2033238563" sldId="278"/>
+            <ac:spMk id="8" creationId="{85C81A99-91CC-E21A-0BFF-C0878CD5747E}"/>
+          </ac:spMkLst>
+        </pc:spChg>
+        <pc:spChg chg="mod">
+          <ac:chgData name="mohammad mojahid" userId="4c1afb2c5ebc34fe" providerId="LiveId" clId="{16CDDD25-34FF-4A34-888C-2A1A2DC70C03}" dt="2026-03-26T14:33:13.906" v="474" actId="20577"/>
+          <ac:spMkLst>
+            <pc:docMk/>
+            <pc:sldMk cId="2033238563" sldId="278"/>
+            <ac:spMk id="11" creationId="{057573BA-4EE9-27B9-9172-B32757EDBBEF}"/>
+          </ac:spMkLst>
+        </pc:spChg>
+        <pc:spChg chg="mod">
+          <ac:chgData name="mohammad mojahid" userId="4c1afb2c5ebc34fe" providerId="LiveId" clId="{16CDDD25-34FF-4A34-888C-2A1A2DC70C03}" dt="2026-03-26T14:33:06.121" v="473" actId="255"/>
+          <ac:spMkLst>
+            <pc:docMk/>
+            <pc:sldMk cId="2033238563" sldId="278"/>
+            <ac:spMk id="12" creationId="{1BFD709F-4A75-9C56-718B-569204B42EB8}"/>
+          </ac:spMkLst>
+        </pc:spChg>
+        <pc:spChg chg="mod">
+          <ac:chgData name="mohammad mojahid" userId="4c1afb2c5ebc34fe" providerId="LiveId" clId="{16CDDD25-34FF-4A34-888C-2A1A2DC70C03}" dt="2026-03-26T14:30:47.344" v="440" actId="20577"/>
+          <ac:spMkLst>
+            <pc:docMk/>
+            <pc:sldMk cId="2033238563" sldId="278"/>
+            <ac:spMk id="14" creationId="{51D6B9B2-7FEA-CB05-6827-581E39800575}"/>
+          </ac:spMkLst>
+        </pc:spChg>
+        <pc:spChg chg="mod">
+          <ac:chgData name="mohammad mojahid" userId="4c1afb2c5ebc34fe" providerId="LiveId" clId="{16CDDD25-34FF-4A34-888C-2A1A2DC70C03}" dt="2026-03-26T14:31:05.489" v="451" actId="20577"/>
+          <ac:spMkLst>
+            <pc:docMk/>
+            <pc:sldMk cId="2033238563" sldId="278"/>
+            <ac:spMk id="16" creationId="{7599E042-5664-FC32-75DC-5EAC42DD5904}"/>
+          </ac:spMkLst>
+        </pc:spChg>
+        <pc:spChg chg="mod">
+          <ac:chgData name="mohammad mojahid" userId="4c1afb2c5ebc34fe" providerId="LiveId" clId="{16CDDD25-34FF-4A34-888C-2A1A2DC70C03}" dt="2026-03-26T14:31:35.604" v="455" actId="1076"/>
+          <ac:spMkLst>
+            <pc:docMk/>
+            <pc:sldMk cId="2033238563" sldId="278"/>
+            <ac:spMk id="17" creationId="{E539CDF7-5B77-D611-A403-77A5C6A7C7CC}"/>
+          </ac:spMkLst>
+        </pc:spChg>
+        <pc:spChg chg="mod">
+          <ac:chgData name="mohammad mojahid" userId="4c1afb2c5ebc34fe" providerId="LiveId" clId="{16CDDD25-34FF-4A34-888C-2A1A2DC70C03}" dt="2026-03-26T14:31:41.270" v="456" actId="20577"/>
+          <ac:spMkLst>
+            <pc:docMk/>
+            <pc:sldMk cId="2033238563" sldId="278"/>
+            <ac:spMk id="18" creationId="{C68CED5E-7A73-09A5-EEC4-249744B4DA4D}"/>
+          </ac:spMkLst>
+        </pc:spChg>
+        <pc:spChg chg="mod">
+          <ac:chgData name="mohammad mojahid" userId="4c1afb2c5ebc34fe" providerId="LiveId" clId="{16CDDD25-34FF-4A34-888C-2A1A2DC70C03}" dt="2026-03-26T14:31:48.918" v="457" actId="20577"/>
+          <ac:spMkLst>
+            <pc:docMk/>
+            <pc:sldMk cId="2033238563" sldId="278"/>
+            <ac:spMk id="20" creationId="{F8BD26AA-D6BE-5DC2-1B2B-60F2E04AC4B8}"/>
+          </ac:spMkLst>
+        </pc:spChg>
+        <pc:spChg chg="mod">
+          <ac:chgData name="mohammad mojahid" userId="4c1afb2c5ebc34fe" providerId="LiveId" clId="{16CDDD25-34FF-4A34-888C-2A1A2DC70C03}" dt="2026-03-26T14:31:54.322" v="458" actId="20577"/>
+          <ac:spMkLst>
+            <pc:docMk/>
+            <pc:sldMk cId="2033238563" sldId="278"/>
+            <ac:spMk id="22" creationId="{6376C5BD-A75B-9A8D-C34D-93DF56C060FF}"/>
+          </ac:spMkLst>
+        </pc:spChg>
+        <pc:spChg chg="mod">
+          <ac:chgData name="mohammad mojahid" userId="4c1afb2c5ebc34fe" providerId="LiveId" clId="{16CDDD25-34FF-4A34-888C-2A1A2DC70C03}" dt="2026-03-26T14:31:58.088" v="459" actId="20577"/>
+          <ac:spMkLst>
+            <pc:docMk/>
+            <pc:sldMk cId="2033238563" sldId="278"/>
+            <ac:spMk id="24" creationId="{95632DDD-C794-0DB7-C87C-6E7D5FDD1679}"/>
+          </ac:spMkLst>
+        </pc:spChg>
+        <pc:spChg chg="mod">
+          <ac:chgData name="mohammad mojahid" userId="4c1afb2c5ebc34fe" providerId="LiveId" clId="{16CDDD25-34FF-4A34-888C-2A1A2DC70C03}" dt="2026-03-26T14:32:03.289" v="460" actId="20577"/>
+          <ac:spMkLst>
+            <pc:docMk/>
+            <pc:sldMk cId="2033238563" sldId="278"/>
+            <ac:spMk id="26" creationId="{619FAE67-6C89-BC1B-9436-6F92E67D0B8F}"/>
+          </ac:spMkLst>
+        </pc:spChg>
+        <pc:spChg chg="add mod">
+          <ac:chgData name="mohammad mojahid" userId="4c1afb2c5ebc34fe" providerId="LiveId" clId="{16CDDD25-34FF-4A34-888C-2A1A2DC70C03}" dt="2026-03-26T14:34:03.394" v="498" actId="115"/>
+          <ac:spMkLst>
+            <pc:docMk/>
+            <pc:sldMk cId="2033238563" sldId="278"/>
+            <ac:spMk id="27" creationId="{27B025DE-F912-79B2-8EDB-02731BF11C8D}"/>
+          </ac:spMkLst>
+        </pc:spChg>
+        <pc:picChg chg="del">
+          <ac:chgData name="mohammad mojahid" userId="4c1afb2c5ebc34fe" providerId="LiveId" clId="{16CDDD25-34FF-4A34-888C-2A1A2DC70C03}" dt="2026-03-26T14:29:26.404" v="397" actId="478"/>
+          <ac:picMkLst>
+            <pc:docMk/>
+            <pc:sldMk cId="2033238563" sldId="278"/>
+            <ac:picMk id="28" creationId="{DA4C0171-74BA-AE3C-8CBF-0556A6C0547F}"/>
+          </ac:picMkLst>
+        </pc:picChg>
+      </pc:sldChg>
+      <pc:sldChg chg="new del">
+        <pc:chgData name="mohammad mojahid" userId="4c1afb2c5ebc34fe" providerId="LiveId" clId="{16CDDD25-34FF-4A34-888C-2A1A2DC70C03}" dt="2026-03-26T14:28:40.619" v="395" actId="47"/>
+        <pc:sldMkLst>
+          <pc:docMk/>
+          <pc:sldMk cId="3887119302" sldId="278"/>
+        </pc:sldMkLst>
       </pc:sldChg>
     </pc:docChg>
   </pc:docChgLst>
@@ -462,7 +759,7 @@
           <a:bodyPr/>
           <a:lstStyle/>
           <a:p>
-            <a:endParaRPr lang="en-US"/>
+            <a:endParaRPr lang="en-US" dirty="0"/>
           </a:p>
         </p:txBody>
       </p:sp>
@@ -882,7 +1179,7 @@
           <a:bodyPr/>
           <a:lstStyle/>
           <a:p>
-            <a:endParaRPr lang="en-US"/>
+            <a:endParaRPr lang="en-US" dirty="0"/>
           </a:p>
         </p:txBody>
       </p:sp>
@@ -966,7 +1263,7 @@
           <a:bodyPr/>
           <a:lstStyle/>
           <a:p>
-            <a:endParaRPr lang="en-US"/>
+            <a:endParaRPr lang="en-US" dirty="0"/>
           </a:p>
         </p:txBody>
       </p:sp>
@@ -1050,7 +1347,7 @@
           <a:bodyPr/>
           <a:lstStyle/>
           <a:p>
-            <a:endParaRPr lang="en-US"/>
+            <a:endParaRPr lang="en-US" dirty="0"/>
           </a:p>
         </p:txBody>
       </p:sp>
@@ -1095,7 +1392,13 @@
   <p:cSld>
     <p:spTree>
       <p:nvGrpSpPr>
-        <p:cNvPr id="1" name=""/>
+        <p:cNvPr id="1" name="">
+          <a:extLst>
+            <a:ext uri="{FF2B5EF4-FFF2-40B4-BE49-F238E27FC236}">
+              <a16:creationId xmlns:a16="http://schemas.microsoft.com/office/drawing/2014/main" id="{138D394A-6861-739C-0603-0A09F703FFF9}"/>
+            </a:ext>
+          </a:extLst>
+        </p:cNvPr>
         <p:cNvGrpSpPr/>
         <p:nvPr/>
       </p:nvGrpSpPr>
@@ -1109,7 +1412,13 @@
       </p:grpSpPr>
       <p:sp>
         <p:nvSpPr>
-          <p:cNvPr id="2" name="Slide Image Placeholder 1"/>
+          <p:cNvPr id="2" name="Slide Image Placeholder 1">
+            <a:extLst>
+              <a:ext uri="{FF2B5EF4-FFF2-40B4-BE49-F238E27FC236}">
+                <a16:creationId xmlns:a16="http://schemas.microsoft.com/office/drawing/2014/main" id="{3FF815B5-5E31-19A0-74E3-A50420F3B479}"/>
+              </a:ext>
+            </a:extLst>
+          </p:cNvPr>
           <p:cNvSpPr>
             <a:spLocks noGrp="1" noRot="1" noChangeAspect="1"/>
           </p:cNvSpPr>
@@ -1121,7 +1430,13 @@
       </p:sp>
       <p:sp>
         <p:nvSpPr>
-          <p:cNvPr id="3" name="Notes Placeholder 2"/>
+          <p:cNvPr id="3" name="Notes Placeholder 2">
+            <a:extLst>
+              <a:ext uri="{FF2B5EF4-FFF2-40B4-BE49-F238E27FC236}">
+                <a16:creationId xmlns:a16="http://schemas.microsoft.com/office/drawing/2014/main" id="{D46452B5-64B4-3B4D-4863-A0E5E60A2F2C}"/>
+              </a:ext>
+            </a:extLst>
+          </p:cNvPr>
           <p:cNvSpPr>
             <a:spLocks noGrp="1"/>
           </p:cNvSpPr>
@@ -1134,13 +1449,19 @@
           <a:bodyPr/>
           <a:lstStyle/>
           <a:p>
-            <a:endParaRPr lang="en-US"/>
-          </a:p>
-        </p:txBody>
-      </p:sp>
-      <p:sp>
-        <p:nvSpPr>
-          <p:cNvPr id="4" name="Slide Number Placeholder 3"/>
+            <a:endParaRPr lang="en-US" dirty="0"/>
+          </a:p>
+        </p:txBody>
+      </p:sp>
+      <p:sp>
+        <p:nvSpPr>
+          <p:cNvPr id="4" name="Slide Number Placeholder 3">
+            <a:extLst>
+              <a:ext uri="{FF2B5EF4-FFF2-40B4-BE49-F238E27FC236}">
+                <a16:creationId xmlns:a16="http://schemas.microsoft.com/office/drawing/2014/main" id="{2D27F529-174C-E395-8B06-EA8792E3F54E}"/>
+              </a:ext>
+            </a:extLst>
+          </p:cNvPr>
           <p:cNvSpPr>
             <a:spLocks noGrp="1"/>
           </p:cNvSpPr>
@@ -1164,7 +1485,7 @@
     </p:spTree>
     <p:extLst>
       <p:ext uri="{BB962C8B-B14F-4D97-AF65-F5344CB8AC3E}">
-        <p14:creationId xmlns:p14="http://schemas.microsoft.com/office/powerpoint/2010/main" val="1024086991"/>
+        <p14:creationId xmlns:p14="http://schemas.microsoft.com/office/powerpoint/2010/main" val="2237799840"/>
       </p:ext>
     </p:extLst>
   </p:cSld>
@@ -2614,6 +2935,13 @@
           </a:solidFill>
           <a:ln/>
         </p:spPr>
+        <p:txBody>
+          <a:bodyPr/>
+          <a:lstStyle/>
+          <a:p>
+            <a:endParaRPr lang="en-US" dirty="0"/>
+          </a:p>
+        </p:txBody>
       </p:sp>
       <p:sp>
         <p:nvSpPr>
@@ -3079,7 +3407,7 @@
               <a:buNone/>
             </a:pPr>
             <a:r>
-              <a:rPr lang="en-US" sz="1400">
+              <a:rPr lang="en-US" sz="1400" dirty="0">
                 <a:solidFill>
                   <a:srgbClr val="94A3B8"/>
                 </a:solidFill>
@@ -3087,10 +3415,10 @@
                 <a:ea typeface="Segoe UI" pitchFamily="34" charset="-122"/>
                 <a:cs typeface="Segoe UI" pitchFamily="34" charset="-120"/>
               </a:rPr>
-              <a:t>Year:  </a:t>
-            </a:r>
-            <a:r>
-              <a:rPr lang="en-US" sz="1400" b="1">
+              <a:t>Academic Year:  </a:t>
+            </a:r>
+            <a:r>
+              <a:rPr lang="en-US" sz="1400" b="1" dirty="0">
                 <a:solidFill>
                   <a:srgbClr val="FFFFFF"/>
                 </a:solidFill>
@@ -3098,9 +3426,9 @@
                 <a:ea typeface="Segoe UI" pitchFamily="34" charset="-122"/>
                 <a:cs typeface="Segoe UI" pitchFamily="34" charset="-120"/>
               </a:rPr>
-              <a:t>2025 – 2026</a:t>
-            </a:r>
-            <a:endParaRPr lang="en-US" sz="1400"/>
+              <a:t>2023 – 2026</a:t>
+            </a:r>
+            <a:endParaRPr lang="en-US" sz="1400" dirty="0"/>
           </a:p>
         </p:txBody>
       </p:sp>
@@ -3160,6 +3488,74 @@
               <a:t>6th Semester Project Presentation</a:t>
             </a:r>
             <a:endParaRPr lang="en-US" sz="1000"/>
+          </a:p>
+        </p:txBody>
+      </p:sp>
+      <p:sp>
+        <p:nvSpPr>
+          <p:cNvPr id="19" name="TextBox 18">
+            <a:extLst>
+              <a:ext uri="{FF2B5EF4-FFF2-40B4-BE49-F238E27FC236}">
+                <a16:creationId xmlns:a16="http://schemas.microsoft.com/office/drawing/2014/main" id="{2B204196-8898-02A9-881A-67F25D7D2A60}"/>
+              </a:ext>
+            </a:extLst>
+          </p:cNvPr>
+          <p:cNvSpPr txBox="1"/>
+          <p:nvPr/>
+        </p:nvSpPr>
+        <p:spPr>
+          <a:xfrm>
+            <a:off x="8879841" y="5653428"/>
+            <a:ext cx="3382498" cy="830997"/>
+          </a:xfrm>
+          <a:prstGeom prst="rect">
+            <a:avLst/>
+          </a:prstGeom>
+          <a:noFill/>
+        </p:spPr>
+        <p:txBody>
+          <a:bodyPr wrap="square" rtlCol="0">
+            <a:spAutoFit/>
+          </a:bodyPr>
+          <a:lstStyle/>
+          <a:p>
+            <a:r>
+              <a:rPr lang="en-US" sz="1600" dirty="0">
+                <a:solidFill>
+                  <a:schemeClr val="bg1">
+                    <a:lumMod val="95000"/>
+                  </a:schemeClr>
+                </a:solidFill>
+                <a:latin typeface="Amasis MT Pro Medium" panose="02040604050005020304" pitchFamily="18" charset="0"/>
+              </a:rPr>
+              <a:t>UNDER THE GUIDANCE OF:</a:t>
+            </a:r>
+          </a:p>
+          <a:p>
+            <a:r>
+              <a:rPr lang="en-US" sz="1600" dirty="0">
+                <a:solidFill>
+                  <a:schemeClr val="bg1">
+                    <a:lumMod val="95000"/>
+                  </a:schemeClr>
+                </a:solidFill>
+                <a:latin typeface="Amasis MT Pro Medium" panose="02040604050005020304" pitchFamily="18" charset="0"/>
+              </a:rPr>
+              <a:t>MR. SHUBHASHISH BEHERA</a:t>
+            </a:r>
+          </a:p>
+          <a:p>
+            <a:r>
+              <a:rPr lang="en-US" sz="1600" dirty="0">
+                <a:solidFill>
+                  <a:schemeClr val="bg1">
+                    <a:lumMod val="95000"/>
+                  </a:schemeClr>
+                </a:solidFill>
+                <a:latin typeface="Amasis MT Pro Medium" panose="02040604050005020304" pitchFamily="18" charset="0"/>
+              </a:rPr>
+              <a:t>MR. SAMBIT </a:t>
+            </a:r>
           </a:p>
         </p:txBody>
       </p:sp>
@@ -5666,6 +6062,13 @@
             <a:prstDash val="solid"/>
           </a:ln>
         </p:spPr>
+        <p:txBody>
+          <a:bodyPr/>
+          <a:lstStyle/>
+          <a:p>
+            <a:endParaRPr lang="en-US"/>
+          </a:p>
+        </p:txBody>
       </p:sp>
       <p:sp>
         <p:nvSpPr>
@@ -5692,7 +6095,7 @@
               <a:buNone/>
             </a:pPr>
             <a:r>
-              <a:rPr lang="en-US" sz="2000" b="1">
+              <a:rPr lang="en-US" sz="2000" b="1" dirty="0">
                 <a:solidFill>
                   <a:srgbClr val="2D3561"/>
                 </a:solidFill>
@@ -5702,7 +6105,7 @@
               </a:rPr>
               <a:t>[ Insert Landing Page Screenshot ]</a:t>
             </a:r>
-            <a:endParaRPr lang="en-US" sz="2000"/>
+            <a:endParaRPr lang="en-US" sz="2000" dirty="0"/>
           </a:p>
         </p:txBody>
       </p:sp>
@@ -6551,7 +6954,7 @@
       </p:sp>
       <p:pic>
         <p:nvPicPr>
-          <p:cNvPr id="28" name="Picture 27">
+          <p:cNvPr id="29" name="Picture 28">
             <a:extLst>
               <a:ext uri="{FF2B5EF4-FFF2-40B4-BE49-F238E27FC236}">
                 <a16:creationId xmlns:a16="http://schemas.microsoft.com/office/drawing/2014/main" id="{362BE507-5261-3939-6A7A-767EB347840E}"/>
@@ -6863,6 +7266,13 @@
             </a:outerShdw>
           </a:effectLst>
         </p:spPr>
+        <p:txBody>
+          <a:bodyPr/>
+          <a:lstStyle/>
+          <a:p>
+            <a:endParaRPr lang="en-US" dirty="0"/>
+          </a:p>
+        </p:txBody>
       </p:sp>
       <p:sp>
         <p:nvSpPr>
@@ -6889,7 +7299,7 @@
               <a:buNone/>
             </a:pPr>
             <a:r>
-              <a:rPr lang="en-US" sz="1600" b="1">
+              <a:rPr lang="en-US" sz="1600" b="1" dirty="0">
                 <a:solidFill>
                   <a:srgbClr val="2D3561"/>
                 </a:solidFill>
@@ -6899,7 +7309,7 @@
               </a:rPr>
               <a:t>[ Insert Screenshot ]</a:t>
             </a:r>
-            <a:endParaRPr lang="en-US" sz="1600"/>
+            <a:endParaRPr lang="en-US" sz="1600" dirty="0"/>
           </a:p>
         </p:txBody>
       </p:sp>
@@ -7346,6 +7756,36 @@
           </a:p>
         </p:txBody>
       </p:sp>
+      <p:pic>
+        <p:nvPicPr>
+          <p:cNvPr id="30" name="Picture 29">
+            <a:extLst>
+              <a:ext uri="{FF2B5EF4-FFF2-40B4-BE49-F238E27FC236}">
+                <a16:creationId xmlns:a16="http://schemas.microsoft.com/office/drawing/2014/main" id="{E352B8FB-A212-DF4B-DD4C-2D24462C9937}"/>
+              </a:ext>
+            </a:extLst>
+          </p:cNvPr>
+          <p:cNvPicPr>
+            <a:picLocks noChangeAspect="1"/>
+          </p:cNvPicPr>
+          <p:nvPr/>
+        </p:nvPicPr>
+        <p:blipFill>
+          <a:blip r:embed="rId3"/>
+          <a:stretch>
+            <a:fillRect/>
+          </a:stretch>
+        </p:blipFill>
+        <p:spPr>
+          <a:xfrm>
+            <a:off x="1445768" y="1708099"/>
+            <a:ext cx="9288272" cy="3739896"/>
+          </a:xfrm>
+          <a:prstGeom prst="rect">
+            <a:avLst/>
+          </a:prstGeom>
+        </p:spPr>
+      </p:pic>
     </p:spTree>
   </p:cSld>
   <p:clrMapOvr>
@@ -7656,7 +8096,7 @@
               <a:buNone/>
             </a:pPr>
             <a:r>
-              <a:rPr lang="en-US" sz="1600" b="1">
+              <a:rPr lang="en-US" sz="1600" b="1" dirty="0">
                 <a:solidFill>
                   <a:srgbClr val="2D3561"/>
                 </a:solidFill>
@@ -7666,7 +8106,7 @@
               </a:rPr>
               <a:t>[ Insert Screenshot ]</a:t>
             </a:r>
-            <a:endParaRPr lang="en-US" sz="1600"/>
+            <a:endParaRPr lang="en-US" sz="1600" dirty="0"/>
           </a:p>
         </p:txBody>
       </p:sp>
@@ -8113,6 +8553,36 @@
           </a:p>
         </p:txBody>
       </p:sp>
+      <p:pic>
+        <p:nvPicPr>
+          <p:cNvPr id="30" name="Picture 29">
+            <a:extLst>
+              <a:ext uri="{FF2B5EF4-FFF2-40B4-BE49-F238E27FC236}">
+                <a16:creationId xmlns:a16="http://schemas.microsoft.com/office/drawing/2014/main" id="{E6A4EE72-959B-70D3-1ABC-F14C7D1B899D}"/>
+              </a:ext>
+            </a:extLst>
+          </p:cNvPr>
+          <p:cNvPicPr>
+            <a:picLocks noChangeAspect="1"/>
+          </p:cNvPicPr>
+          <p:nvPr/>
+        </p:nvPicPr>
+        <p:blipFill>
+          <a:blip r:embed="rId3"/>
+          <a:stretch>
+            <a:fillRect/>
+          </a:stretch>
+        </p:blipFill>
+        <p:spPr>
+          <a:xfrm>
+            <a:off x="4863115" y="1674728"/>
+            <a:ext cx="2352994" cy="3745835"/>
+          </a:xfrm>
+          <a:prstGeom prst="rect">
+            <a:avLst/>
+          </a:prstGeom>
+        </p:spPr>
+      </p:pic>
     </p:spTree>
   </p:cSld>
   <p:clrMapOvr>
@@ -8122,773 +8592,6 @@
 </file>
 
 <file path=ppt/slides/slide16.xml><?xml version="1.0" encoding="utf-8"?>
-<p:sld xmlns:a="http://schemas.openxmlformats.org/drawingml/2006/main" xmlns:r="http://schemas.openxmlformats.org/officeDocument/2006/relationships" xmlns:p="http://schemas.openxmlformats.org/presentationml/2006/main">
-  <p:cSld name="Slide 15">
-    <p:spTree>
-      <p:nvGrpSpPr>
-        <p:cNvPr id="1" name=""/>
-        <p:cNvGrpSpPr/>
-        <p:nvPr/>
-      </p:nvGrpSpPr>
-      <p:grpSpPr>
-        <a:xfrm>
-          <a:off x="0" y="0"/>
-          <a:ext cx="0" cy="0"/>
-          <a:chOff x="0" y="0"/>
-          <a:chExt cx="0" cy="0"/>
-        </a:xfrm>
-      </p:grpSpPr>
-      <p:sp>
-        <p:nvSpPr>
-          <p:cNvPr id="2" name="Shape 0"/>
-          <p:cNvSpPr/>
-          <p:nvPr/>
-        </p:nvSpPr>
-        <p:spPr>
-          <a:xfrm>
-            <a:off x="0" y="0"/>
-            <a:ext cx="12192000" cy="6858000"/>
-          </a:xfrm>
-          <a:prstGeom prst="rect">
-            <a:avLst/>
-          </a:prstGeom>
-          <a:solidFill>
-            <a:srgbClr val="0A0E1A"/>
-          </a:solidFill>
-          <a:ln/>
-        </p:spPr>
-      </p:sp>
-      <p:sp>
-        <p:nvSpPr>
-          <p:cNvPr id="3" name="Shape 1"/>
-          <p:cNvSpPr/>
-          <p:nvPr/>
-        </p:nvSpPr>
-        <p:spPr>
-          <a:xfrm>
-            <a:off x="-1828800" y="-1828800"/>
-            <a:ext cx="6400800" cy="6400800"/>
-          </a:xfrm>
-          <a:prstGeom prst="ellipse">
-            <a:avLst/>
-          </a:prstGeom>
-          <a:solidFill>
-            <a:srgbClr val="111832"/>
-          </a:solidFill>
-          <a:ln w="12700">
-            <a:solidFill>
-              <a:srgbClr val="111832"/>
-            </a:solidFill>
-            <a:prstDash val="solid"/>
-          </a:ln>
-        </p:spPr>
-      </p:sp>
-      <p:sp>
-        <p:nvSpPr>
-          <p:cNvPr id="4" name="Shape 2"/>
-          <p:cNvSpPr/>
-          <p:nvPr/>
-        </p:nvSpPr>
-        <p:spPr>
-          <a:xfrm>
-            <a:off x="8229600" y="3657600"/>
-            <a:ext cx="5486400" cy="5486400"/>
-          </a:xfrm>
-          <a:prstGeom prst="ellipse">
-            <a:avLst/>
-          </a:prstGeom>
-          <a:solidFill>
-            <a:srgbClr val="0D1225"/>
-          </a:solidFill>
-          <a:ln w="12700">
-            <a:solidFill>
-              <a:srgbClr val="0D1225"/>
-            </a:solidFill>
-            <a:prstDash val="solid"/>
-          </a:ln>
-        </p:spPr>
-      </p:sp>
-      <p:sp>
-        <p:nvSpPr>
-          <p:cNvPr id="5" name="Shape 3"/>
-          <p:cNvSpPr/>
-          <p:nvPr/>
-        </p:nvSpPr>
-        <p:spPr>
-          <a:xfrm>
-            <a:off x="0" y="0"/>
-            <a:ext cx="12192000" cy="36576"/>
-          </a:xfrm>
-          <a:prstGeom prst="rect">
-            <a:avLst/>
-          </a:prstGeom>
-          <a:solidFill>
-            <a:srgbClr val="6C63FF"/>
-          </a:solidFill>
-          <a:ln/>
-        </p:spPr>
-      </p:sp>
-      <p:sp>
-        <p:nvSpPr>
-          <p:cNvPr id="6" name="Shape 4"/>
-          <p:cNvSpPr/>
-          <p:nvPr/>
-        </p:nvSpPr>
-        <p:spPr>
-          <a:xfrm>
-            <a:off x="274320" y="182880"/>
-            <a:ext cx="54864" cy="640080"/>
-          </a:xfrm>
-          <a:prstGeom prst="rect">
-            <a:avLst/>
-          </a:prstGeom>
-          <a:solidFill>
-            <a:srgbClr val="6C63FF"/>
-          </a:solidFill>
-          <a:ln/>
-        </p:spPr>
-      </p:sp>
-      <p:sp>
-        <p:nvSpPr>
-          <p:cNvPr id="7" name="Text 5"/>
-          <p:cNvSpPr/>
-          <p:nvPr/>
-        </p:nvSpPr>
-        <p:spPr>
-          <a:xfrm>
-            <a:off x="457200" y="137160"/>
-            <a:ext cx="10972800" cy="731520"/>
-          </a:xfrm>
-          <a:prstGeom prst="rect">
-            <a:avLst/>
-          </a:prstGeom>
-          <a:noFill/>
-          <a:ln/>
-        </p:spPr>
-        <p:txBody>
-          <a:bodyPr wrap="square" rtlCol="0" anchor="ctr"/>
-          <a:lstStyle/>
-          <a:p>
-            <a:pPr marL="0" indent="0">
-              <a:buNone/>
-            </a:pPr>
-            <a:r>
-              <a:rPr lang="en-US" sz="2800" b="1">
-                <a:solidFill>
-                  <a:srgbClr val="FFFFFF"/>
-                </a:solidFill>
-                <a:latin typeface="Segoe UI" pitchFamily="34" charset="0"/>
-                <a:ea typeface="Segoe UI" pitchFamily="34" charset="-122"/>
-                <a:cs typeface="Segoe UI" pitchFamily="34" charset="-120"/>
-              </a:rPr>
-              <a:t>Notifications &amp; Reminders</a:t>
-            </a:r>
-            <a:endParaRPr lang="en-US" sz="2800"/>
-          </a:p>
-        </p:txBody>
-      </p:sp>
-      <p:sp>
-        <p:nvSpPr>
-          <p:cNvPr id="8" name="Text 6"/>
-          <p:cNvSpPr/>
-          <p:nvPr/>
-        </p:nvSpPr>
-        <p:spPr>
-          <a:xfrm>
-            <a:off x="457200" y="777240"/>
-            <a:ext cx="10972800" cy="320040"/>
-          </a:xfrm>
-          <a:prstGeom prst="rect">
-            <a:avLst/>
-          </a:prstGeom>
-          <a:noFill/>
-          <a:ln/>
-        </p:spPr>
-        <p:txBody>
-          <a:bodyPr wrap="square" rtlCol="0" anchor="ctr"/>
-          <a:lstStyle/>
-          <a:p>
-            <a:pPr marL="0" indent="0">
-              <a:buNone/>
-            </a:pPr>
-            <a:r>
-              <a:rPr lang="en-US" sz="1300">
-                <a:solidFill>
-                  <a:srgbClr val="94A3B8"/>
-                </a:solidFill>
-                <a:latin typeface="Segoe UI" pitchFamily="34" charset="0"/>
-                <a:ea typeface="Segoe UI" pitchFamily="34" charset="-122"/>
-                <a:cs typeface="Segoe UI" pitchFamily="34" charset="-120"/>
-              </a:rPr>
-              <a:t>Auto rent reminders, overdue alerts, type-based badges</a:t>
-            </a:r>
-            <a:endParaRPr lang="en-US" sz="1300"/>
-          </a:p>
-        </p:txBody>
-      </p:sp>
-      <p:sp>
-        <p:nvSpPr>
-          <p:cNvPr id="9" name="Shape 7"/>
-          <p:cNvSpPr/>
-          <p:nvPr/>
-        </p:nvSpPr>
-        <p:spPr>
-          <a:xfrm>
-            <a:off x="1371600" y="1371600"/>
-            <a:ext cx="9445752" cy="263347"/>
-          </a:xfrm>
-          <a:prstGeom prst="rect">
-            <a:avLst/>
-          </a:prstGeom>
-          <a:solidFill>
-            <a:srgbClr val="475569"/>
-          </a:solidFill>
-          <a:ln/>
-        </p:spPr>
-      </p:sp>
-      <p:sp>
-        <p:nvSpPr>
-          <p:cNvPr id="10" name="Shape 8"/>
-          <p:cNvSpPr/>
-          <p:nvPr/>
-        </p:nvSpPr>
-        <p:spPr>
-          <a:xfrm>
-            <a:off x="6039612" y="1437437"/>
-            <a:ext cx="109728" cy="27432"/>
-          </a:xfrm>
-          <a:prstGeom prst="ellipse">
-            <a:avLst/>
-          </a:prstGeom>
-          <a:solidFill>
-            <a:srgbClr val="94A3B8"/>
-          </a:solidFill>
-          <a:ln/>
-        </p:spPr>
-      </p:sp>
-      <p:sp>
-        <p:nvSpPr>
-          <p:cNvPr id="11" name="Shape 9"/>
-          <p:cNvSpPr/>
-          <p:nvPr/>
-        </p:nvSpPr>
-        <p:spPr>
-          <a:xfrm>
-            <a:off x="1371600" y="1634947"/>
-            <a:ext cx="9445752" cy="3862426"/>
-          </a:xfrm>
-          <a:prstGeom prst="rect">
-            <a:avLst/>
-          </a:prstGeom>
-          <a:solidFill>
-            <a:srgbClr val="111832"/>
-          </a:solidFill>
-          <a:ln w="12700">
-            <a:solidFill>
-              <a:srgbClr val="2D3561"/>
-            </a:solidFill>
-            <a:prstDash val="solid"/>
-          </a:ln>
-          <a:effectLst>
-            <a:outerShdw blurRad="190500" dist="63500" dir="16200000" algn="bl" rotWithShape="0">
-              <a:srgbClr val="6C63FF">
-                <a:alpha val="15000"/>
-              </a:srgbClr>
-            </a:outerShdw>
-          </a:effectLst>
-        </p:spPr>
-      </p:sp>
-      <p:sp>
-        <p:nvSpPr>
-          <p:cNvPr id="12" name="Text 10"/>
-          <p:cNvSpPr/>
-          <p:nvPr/>
-        </p:nvSpPr>
-        <p:spPr>
-          <a:xfrm>
-            <a:off x="1371600" y="2468880"/>
-            <a:ext cx="9445752" cy="1755648"/>
-          </a:xfrm>
-          <a:prstGeom prst="rect">
-            <a:avLst/>
-          </a:prstGeom>
-          <a:noFill/>
-          <a:ln/>
-        </p:spPr>
-        <p:txBody>
-          <a:bodyPr wrap="square" rtlCol="0" anchor="ctr"/>
-          <a:lstStyle/>
-          <a:p>
-            <a:pPr marL="0" indent="0" algn="ctr">
-              <a:buNone/>
-            </a:pPr>
-            <a:r>
-              <a:rPr lang="en-US" sz="1600" b="1">
-                <a:solidFill>
-                  <a:srgbClr val="2D3561"/>
-                </a:solidFill>
-                <a:latin typeface="Segoe UI" pitchFamily="34" charset="0"/>
-                <a:ea typeface="Segoe UI" pitchFamily="34" charset="-122"/>
-                <a:cs typeface="Segoe UI" pitchFamily="34" charset="-120"/>
-              </a:rPr>
-              <a:t>[ Insert Screenshot ]</a:t>
-            </a:r>
-            <a:endParaRPr lang="en-US" sz="1600"/>
-          </a:p>
-        </p:txBody>
-      </p:sp>
-      <p:sp>
-        <p:nvSpPr>
-          <p:cNvPr id="13" name="Shape 11"/>
-          <p:cNvSpPr/>
-          <p:nvPr/>
-        </p:nvSpPr>
-        <p:spPr>
-          <a:xfrm>
-            <a:off x="4205326" y="5497373"/>
-            <a:ext cx="3778301" cy="263347"/>
-          </a:xfrm>
-          <a:prstGeom prst="rect">
-            <a:avLst/>
-          </a:prstGeom>
-          <a:solidFill>
-            <a:srgbClr val="475569"/>
-          </a:solidFill>
-          <a:ln/>
-        </p:spPr>
-      </p:sp>
-      <p:sp>
-        <p:nvSpPr>
-          <p:cNvPr id="14" name="Text 12"/>
-          <p:cNvSpPr/>
-          <p:nvPr/>
-        </p:nvSpPr>
-        <p:spPr>
-          <a:xfrm>
-            <a:off x="1371600" y="1708099"/>
-            <a:ext cx="9445752" cy="320040"/>
-          </a:xfrm>
-          <a:prstGeom prst="rect">
-            <a:avLst/>
-          </a:prstGeom>
-          <a:noFill/>
-          <a:ln/>
-        </p:spPr>
-        <p:txBody>
-          <a:bodyPr wrap="square" rtlCol="0" anchor="ctr"/>
-          <a:lstStyle/>
-          <a:p>
-            <a:pPr marL="0" indent="0" algn="ctr">
-              <a:buNone/>
-            </a:pPr>
-            <a:r>
-              <a:rPr lang="en-US" sz="1100" b="1">
-                <a:solidFill>
-                  <a:srgbClr val="00D4FF"/>
-                </a:solidFill>
-                <a:latin typeface="Segoe UI" pitchFamily="34" charset="0"/>
-                <a:ea typeface="Segoe UI" pitchFamily="34" charset="-122"/>
-                <a:cs typeface="Segoe UI" pitchFamily="34" charset="-120"/>
-              </a:rPr>
-              <a:t>Notifications &amp; Reminders</a:t>
-            </a:r>
-            <a:endParaRPr lang="en-US" sz="1100"/>
-          </a:p>
-        </p:txBody>
-      </p:sp>
-      <p:sp>
-        <p:nvSpPr>
-          <p:cNvPr id="15" name="Shape 13"/>
-          <p:cNvSpPr/>
-          <p:nvPr/>
-        </p:nvSpPr>
-        <p:spPr>
-          <a:xfrm>
-            <a:off x="274320" y="6035040"/>
-            <a:ext cx="1828800" cy="384048"/>
-          </a:xfrm>
-          <a:prstGeom prst="rect">
-            <a:avLst/>
-          </a:prstGeom>
-          <a:solidFill>
-            <a:srgbClr val="151B36"/>
-          </a:solidFill>
-          <a:ln w="12700">
-            <a:solidFill>
-              <a:srgbClr val="2D3561"/>
-            </a:solidFill>
-            <a:prstDash val="solid"/>
-          </a:ln>
-        </p:spPr>
-      </p:sp>
-      <p:sp>
-        <p:nvSpPr>
-          <p:cNvPr id="16" name="Text 14"/>
-          <p:cNvSpPr/>
-          <p:nvPr/>
-        </p:nvSpPr>
-        <p:spPr>
-          <a:xfrm>
-            <a:off x="274320" y="6035040"/>
-            <a:ext cx="1828800" cy="384048"/>
-          </a:xfrm>
-          <a:prstGeom prst="rect">
-            <a:avLst/>
-          </a:prstGeom>
-          <a:noFill/>
-          <a:ln/>
-        </p:spPr>
-        <p:txBody>
-          <a:bodyPr wrap="square" rtlCol="0" anchor="ctr"/>
-          <a:lstStyle/>
-          <a:p>
-            <a:pPr marL="0" indent="0" algn="ctr">
-              <a:buNone/>
-            </a:pPr>
-            <a:r>
-              <a:rPr lang="en-US" sz="1000" b="1">
-                <a:solidFill>
-                  <a:srgbClr val="00D4FF"/>
-                </a:solidFill>
-                <a:latin typeface="Segoe UI" pitchFamily="34" charset="0"/>
-                <a:ea typeface="Segoe UI" pitchFamily="34" charset="-122"/>
-                <a:cs typeface="Segoe UI" pitchFamily="34" charset="-120"/>
-              </a:rPr>
-              <a:t>5-Day Alert</a:t>
-            </a:r>
-            <a:endParaRPr lang="en-US" sz="1000"/>
-          </a:p>
-        </p:txBody>
-      </p:sp>
-      <p:sp>
-        <p:nvSpPr>
-          <p:cNvPr id="17" name="Shape 15"/>
-          <p:cNvSpPr/>
-          <p:nvPr/>
-        </p:nvSpPr>
-        <p:spPr>
-          <a:xfrm>
-            <a:off x="2212848" y="6035040"/>
-            <a:ext cx="1828800" cy="384048"/>
-          </a:xfrm>
-          <a:prstGeom prst="rect">
-            <a:avLst/>
-          </a:prstGeom>
-          <a:solidFill>
-            <a:srgbClr val="151B36"/>
-          </a:solidFill>
-          <a:ln w="12700">
-            <a:solidFill>
-              <a:srgbClr val="2D3561"/>
-            </a:solidFill>
-            <a:prstDash val="solid"/>
-          </a:ln>
-        </p:spPr>
-      </p:sp>
-      <p:sp>
-        <p:nvSpPr>
-          <p:cNvPr id="18" name="Text 16"/>
-          <p:cNvSpPr/>
-          <p:nvPr/>
-        </p:nvSpPr>
-        <p:spPr>
-          <a:xfrm>
-            <a:off x="2212848" y="6035040"/>
-            <a:ext cx="1828800" cy="384048"/>
-          </a:xfrm>
-          <a:prstGeom prst="rect">
-            <a:avLst/>
-          </a:prstGeom>
-          <a:noFill/>
-          <a:ln/>
-        </p:spPr>
-        <p:txBody>
-          <a:bodyPr wrap="square" rtlCol="0" anchor="ctr"/>
-          <a:lstStyle/>
-          <a:p>
-            <a:pPr marL="0" indent="0" algn="ctr">
-              <a:buNone/>
-            </a:pPr>
-            <a:r>
-              <a:rPr lang="en-US" sz="1000" b="1">
-                <a:solidFill>
-                  <a:srgbClr val="00D4FF"/>
-                </a:solidFill>
-                <a:latin typeface="Segoe UI" pitchFamily="34" charset="0"/>
-                <a:ea typeface="Segoe UI" pitchFamily="34" charset="-122"/>
-                <a:cs typeface="Segoe UI" pitchFamily="34" charset="-120"/>
-              </a:rPr>
-              <a:t>2-Day Alert</a:t>
-            </a:r>
-            <a:endParaRPr lang="en-US" sz="1000"/>
-          </a:p>
-        </p:txBody>
-      </p:sp>
-      <p:sp>
-        <p:nvSpPr>
-          <p:cNvPr id="19" name="Shape 17"/>
-          <p:cNvSpPr/>
-          <p:nvPr/>
-        </p:nvSpPr>
-        <p:spPr>
-          <a:xfrm>
-            <a:off x="4151376" y="6035040"/>
-            <a:ext cx="1828800" cy="384048"/>
-          </a:xfrm>
-          <a:prstGeom prst="rect">
-            <a:avLst/>
-          </a:prstGeom>
-          <a:solidFill>
-            <a:srgbClr val="151B36"/>
-          </a:solidFill>
-          <a:ln w="12700">
-            <a:solidFill>
-              <a:srgbClr val="2D3561"/>
-            </a:solidFill>
-            <a:prstDash val="solid"/>
-          </a:ln>
-        </p:spPr>
-      </p:sp>
-      <p:sp>
-        <p:nvSpPr>
-          <p:cNvPr id="20" name="Text 18"/>
-          <p:cNvSpPr/>
-          <p:nvPr/>
-        </p:nvSpPr>
-        <p:spPr>
-          <a:xfrm>
-            <a:off x="4151376" y="6035040"/>
-            <a:ext cx="1828800" cy="384048"/>
-          </a:xfrm>
-          <a:prstGeom prst="rect">
-            <a:avLst/>
-          </a:prstGeom>
-          <a:noFill/>
-          <a:ln/>
-        </p:spPr>
-        <p:txBody>
-          <a:bodyPr wrap="square" rtlCol="0" anchor="ctr"/>
-          <a:lstStyle/>
-          <a:p>
-            <a:pPr marL="0" indent="0" algn="ctr">
-              <a:buNone/>
-            </a:pPr>
-            <a:r>
-              <a:rPr lang="en-US" sz="1000" b="1">
-                <a:solidFill>
-                  <a:srgbClr val="00D4FF"/>
-                </a:solidFill>
-                <a:latin typeface="Segoe UI" pitchFamily="34" charset="0"/>
-                <a:ea typeface="Segoe UI" pitchFamily="34" charset="-122"/>
-                <a:cs typeface="Segoe UI" pitchFamily="34" charset="-120"/>
-              </a:rPr>
-              <a:t>Due Today</a:t>
-            </a:r>
-            <a:endParaRPr lang="en-US" sz="1000"/>
-          </a:p>
-        </p:txBody>
-      </p:sp>
-      <p:sp>
-        <p:nvSpPr>
-          <p:cNvPr id="21" name="Shape 19"/>
-          <p:cNvSpPr/>
-          <p:nvPr/>
-        </p:nvSpPr>
-        <p:spPr>
-          <a:xfrm>
-            <a:off x="6089904" y="6035040"/>
-            <a:ext cx="1828800" cy="384048"/>
-          </a:xfrm>
-          <a:prstGeom prst="rect">
-            <a:avLst/>
-          </a:prstGeom>
-          <a:solidFill>
-            <a:srgbClr val="151B36"/>
-          </a:solidFill>
-          <a:ln w="12700">
-            <a:solidFill>
-              <a:srgbClr val="2D3561"/>
-            </a:solidFill>
-            <a:prstDash val="solid"/>
-          </a:ln>
-        </p:spPr>
-      </p:sp>
-      <p:sp>
-        <p:nvSpPr>
-          <p:cNvPr id="22" name="Text 20"/>
-          <p:cNvSpPr/>
-          <p:nvPr/>
-        </p:nvSpPr>
-        <p:spPr>
-          <a:xfrm>
-            <a:off x="6089904" y="6035040"/>
-            <a:ext cx="1828800" cy="384048"/>
-          </a:xfrm>
-          <a:prstGeom prst="rect">
-            <a:avLst/>
-          </a:prstGeom>
-          <a:noFill/>
-          <a:ln/>
-        </p:spPr>
-        <p:txBody>
-          <a:bodyPr wrap="square" rtlCol="0" anchor="ctr"/>
-          <a:lstStyle/>
-          <a:p>
-            <a:pPr marL="0" indent="0" algn="ctr">
-              <a:buNone/>
-            </a:pPr>
-            <a:r>
-              <a:rPr lang="en-US" sz="1000" b="1">
-                <a:solidFill>
-                  <a:srgbClr val="00D4FF"/>
-                </a:solidFill>
-                <a:latin typeface="Segoe UI" pitchFamily="34" charset="0"/>
-                <a:ea typeface="Segoe UI" pitchFamily="34" charset="-122"/>
-                <a:cs typeface="Segoe UI" pitchFamily="34" charset="-120"/>
-              </a:rPr>
-              <a:t>Overdue</a:t>
-            </a:r>
-            <a:endParaRPr lang="en-US" sz="1000"/>
-          </a:p>
-        </p:txBody>
-      </p:sp>
-      <p:sp>
-        <p:nvSpPr>
-          <p:cNvPr id="23" name="Shape 21"/>
-          <p:cNvSpPr/>
-          <p:nvPr/>
-        </p:nvSpPr>
-        <p:spPr>
-          <a:xfrm>
-            <a:off x="8028432" y="6035040"/>
-            <a:ext cx="1828800" cy="384048"/>
-          </a:xfrm>
-          <a:prstGeom prst="rect">
-            <a:avLst/>
-          </a:prstGeom>
-          <a:solidFill>
-            <a:srgbClr val="151B36"/>
-          </a:solidFill>
-          <a:ln w="12700">
-            <a:solidFill>
-              <a:srgbClr val="2D3561"/>
-            </a:solidFill>
-            <a:prstDash val="solid"/>
-          </a:ln>
-        </p:spPr>
-      </p:sp>
-      <p:sp>
-        <p:nvSpPr>
-          <p:cNvPr id="24" name="Text 22"/>
-          <p:cNvSpPr/>
-          <p:nvPr/>
-        </p:nvSpPr>
-        <p:spPr>
-          <a:xfrm>
-            <a:off x="8028432" y="6035040"/>
-            <a:ext cx="1828800" cy="384048"/>
-          </a:xfrm>
-          <a:prstGeom prst="rect">
-            <a:avLst/>
-          </a:prstGeom>
-          <a:noFill/>
-          <a:ln/>
-        </p:spPr>
-        <p:txBody>
-          <a:bodyPr wrap="square" rtlCol="0" anchor="ctr"/>
-          <a:lstStyle/>
-          <a:p>
-            <a:pPr marL="0" indent="0" algn="ctr">
-              <a:buNone/>
-            </a:pPr>
-            <a:r>
-              <a:rPr lang="en-US" sz="1000" b="1">
-                <a:solidFill>
-                  <a:srgbClr val="00D4FF"/>
-                </a:solidFill>
-                <a:latin typeface="Segoe UI" pitchFamily="34" charset="0"/>
-                <a:ea typeface="Segoe UI" pitchFamily="34" charset="-122"/>
-                <a:cs typeface="Segoe UI" pitchFamily="34" charset="-120"/>
-              </a:rPr>
-              <a:t>Mark Read</a:t>
-            </a:r>
-            <a:endParaRPr lang="en-US" sz="1000"/>
-          </a:p>
-        </p:txBody>
-      </p:sp>
-      <p:sp>
-        <p:nvSpPr>
-          <p:cNvPr id="25" name="Shape 23"/>
-          <p:cNvSpPr/>
-          <p:nvPr/>
-        </p:nvSpPr>
-        <p:spPr>
-          <a:xfrm>
-            <a:off x="9966960" y="6035040"/>
-            <a:ext cx="1828800" cy="384048"/>
-          </a:xfrm>
-          <a:prstGeom prst="rect">
-            <a:avLst/>
-          </a:prstGeom>
-          <a:solidFill>
-            <a:srgbClr val="151B36"/>
-          </a:solidFill>
-          <a:ln w="12700">
-            <a:solidFill>
-              <a:srgbClr val="2D3561"/>
-            </a:solidFill>
-            <a:prstDash val="solid"/>
-          </a:ln>
-        </p:spPr>
-      </p:sp>
-      <p:sp>
-        <p:nvSpPr>
-          <p:cNvPr id="26" name="Text 24"/>
-          <p:cNvSpPr/>
-          <p:nvPr/>
-        </p:nvSpPr>
-        <p:spPr>
-          <a:xfrm>
-            <a:off x="9966960" y="6035040"/>
-            <a:ext cx="1828800" cy="384048"/>
-          </a:xfrm>
-          <a:prstGeom prst="rect">
-            <a:avLst/>
-          </a:prstGeom>
-          <a:noFill/>
-          <a:ln/>
-        </p:spPr>
-        <p:txBody>
-          <a:bodyPr wrap="square" rtlCol="0" anchor="ctr"/>
-          <a:lstStyle/>
-          <a:p>
-            <a:pPr marL="0" indent="0" algn="ctr">
-              <a:buNone/>
-            </a:pPr>
-            <a:r>
-              <a:rPr lang="en-US" sz="1000" b="1">
-                <a:solidFill>
-                  <a:srgbClr val="00D4FF"/>
-                </a:solidFill>
-                <a:latin typeface="Segoe UI" pitchFamily="34" charset="0"/>
-                <a:ea typeface="Segoe UI" pitchFamily="34" charset="-122"/>
-                <a:cs typeface="Segoe UI" pitchFamily="34" charset="-120"/>
-              </a:rPr>
-              <a:t>Badges</a:t>
-            </a:r>
-            <a:endParaRPr lang="en-US" sz="1000"/>
-          </a:p>
-        </p:txBody>
-      </p:sp>
-    </p:spTree>
-  </p:cSld>
-  <p:clrMapOvr>
-    <a:masterClrMapping/>
-  </p:clrMapOvr>
-</p:sld>
-</file>
-
-<file path=ppt/slides/slide17.xml><?xml version="1.0" encoding="utf-8"?>
 <p:sld xmlns:a="http://schemas.openxmlformats.org/drawingml/2006/main" xmlns:r="http://schemas.openxmlformats.org/officeDocument/2006/relationships" xmlns:p="http://schemas.openxmlformats.org/presentationml/2006/main">
   <p:cSld name="Slide 16">
     <p:spTree>
@@ -9190,7 +8893,7 @@
               <a:buNone/>
             </a:pPr>
             <a:r>
-              <a:rPr lang="en-US" sz="1600" b="1">
+              <a:rPr lang="en-US" sz="1600" b="1" dirty="0">
                 <a:solidFill>
                   <a:srgbClr val="2D3561"/>
                 </a:solidFill>
@@ -9200,7 +8903,7 @@
               </a:rPr>
               <a:t>[ Insert Screenshot ]</a:t>
             </a:r>
-            <a:endParaRPr lang="en-US" sz="1600"/>
+            <a:endParaRPr lang="en-US" sz="1600" dirty="0"/>
           </a:p>
         </p:txBody>
       </p:sp>
@@ -9647,7 +9350,946 @@
           </a:p>
         </p:txBody>
       </p:sp>
+      <p:pic>
+        <p:nvPicPr>
+          <p:cNvPr id="28" name="Picture 27">
+            <a:extLst>
+              <a:ext uri="{FF2B5EF4-FFF2-40B4-BE49-F238E27FC236}">
+                <a16:creationId xmlns:a16="http://schemas.microsoft.com/office/drawing/2014/main" id="{DDF7FACF-826F-1054-A64B-0F825AD829F5}"/>
+              </a:ext>
+            </a:extLst>
+          </p:cNvPr>
+          <p:cNvPicPr>
+            <a:picLocks noChangeAspect="1"/>
+          </p:cNvPicPr>
+          <p:nvPr/>
+        </p:nvPicPr>
+        <p:blipFill>
+          <a:blip r:embed="rId3"/>
+          <a:stretch>
+            <a:fillRect/>
+          </a:stretch>
+        </p:blipFill>
+        <p:spPr>
+          <a:xfrm>
+            <a:off x="1438072" y="2071595"/>
+            <a:ext cx="9303663" cy="2989129"/>
+          </a:xfrm>
+          <a:prstGeom prst="rect">
+            <a:avLst/>
+          </a:prstGeom>
+        </p:spPr>
+      </p:pic>
     </p:spTree>
+  </p:cSld>
+  <p:clrMapOvr>
+    <a:masterClrMapping/>
+  </p:clrMapOvr>
+</p:sld>
+</file>
+
+<file path=ppt/slides/slide17.xml><?xml version="1.0" encoding="utf-8"?>
+<p:sld xmlns:a="http://schemas.openxmlformats.org/drawingml/2006/main" xmlns:r="http://schemas.openxmlformats.org/officeDocument/2006/relationships" xmlns:p="http://schemas.openxmlformats.org/presentationml/2006/main">
+  <p:cSld>
+    <p:spTree>
+      <p:nvGrpSpPr>
+        <p:cNvPr id="1" name="">
+          <a:extLst>
+            <a:ext uri="{FF2B5EF4-FFF2-40B4-BE49-F238E27FC236}">
+              <a16:creationId xmlns:a16="http://schemas.microsoft.com/office/drawing/2014/main" id="{3E1D9050-D03C-1BC4-50F3-3E61BA60D124}"/>
+            </a:ext>
+          </a:extLst>
+        </p:cNvPr>
+        <p:cNvGrpSpPr/>
+        <p:nvPr/>
+      </p:nvGrpSpPr>
+      <p:grpSpPr>
+        <a:xfrm>
+          <a:off x="0" y="0"/>
+          <a:ext cx="0" cy="0"/>
+          <a:chOff x="0" y="0"/>
+          <a:chExt cx="0" cy="0"/>
+        </a:xfrm>
+      </p:grpSpPr>
+      <p:sp>
+        <p:nvSpPr>
+          <p:cNvPr id="2" name="Shape 0">
+            <a:extLst>
+              <a:ext uri="{FF2B5EF4-FFF2-40B4-BE49-F238E27FC236}">
+                <a16:creationId xmlns:a16="http://schemas.microsoft.com/office/drawing/2014/main" id="{A8AAEE5A-E2F1-2B83-57F9-191723A404D9}"/>
+              </a:ext>
+            </a:extLst>
+          </p:cNvPr>
+          <p:cNvSpPr/>
+          <p:nvPr/>
+        </p:nvSpPr>
+        <p:spPr>
+          <a:xfrm>
+            <a:off x="0" y="0"/>
+            <a:ext cx="12192000" cy="6858000"/>
+          </a:xfrm>
+          <a:prstGeom prst="rect">
+            <a:avLst/>
+          </a:prstGeom>
+          <a:solidFill>
+            <a:srgbClr val="0A0E1A"/>
+          </a:solidFill>
+          <a:ln/>
+        </p:spPr>
+      </p:sp>
+      <p:sp>
+        <p:nvSpPr>
+          <p:cNvPr id="3" name="Shape 1">
+            <a:extLst>
+              <a:ext uri="{FF2B5EF4-FFF2-40B4-BE49-F238E27FC236}">
+                <a16:creationId xmlns:a16="http://schemas.microsoft.com/office/drawing/2014/main" id="{1AC7C885-5EFD-6034-A5A4-C4D6DAB17369}"/>
+              </a:ext>
+            </a:extLst>
+          </p:cNvPr>
+          <p:cNvSpPr/>
+          <p:nvPr/>
+        </p:nvSpPr>
+        <p:spPr>
+          <a:xfrm>
+            <a:off x="-1828800" y="-1828800"/>
+            <a:ext cx="6400800" cy="6400800"/>
+          </a:xfrm>
+          <a:prstGeom prst="ellipse">
+            <a:avLst/>
+          </a:prstGeom>
+          <a:solidFill>
+            <a:srgbClr val="111832"/>
+          </a:solidFill>
+          <a:ln w="12700">
+            <a:solidFill>
+              <a:srgbClr val="111832"/>
+            </a:solidFill>
+            <a:prstDash val="solid"/>
+          </a:ln>
+        </p:spPr>
+      </p:sp>
+      <p:sp>
+        <p:nvSpPr>
+          <p:cNvPr id="4" name="Shape 2">
+            <a:extLst>
+              <a:ext uri="{FF2B5EF4-FFF2-40B4-BE49-F238E27FC236}">
+                <a16:creationId xmlns:a16="http://schemas.microsoft.com/office/drawing/2014/main" id="{0505C35C-F62F-2498-99BE-BB5C739C0A24}"/>
+              </a:ext>
+            </a:extLst>
+          </p:cNvPr>
+          <p:cNvSpPr/>
+          <p:nvPr/>
+        </p:nvSpPr>
+        <p:spPr>
+          <a:xfrm>
+            <a:off x="8229600" y="3657600"/>
+            <a:ext cx="5486400" cy="5486400"/>
+          </a:xfrm>
+          <a:prstGeom prst="ellipse">
+            <a:avLst/>
+          </a:prstGeom>
+          <a:solidFill>
+            <a:srgbClr val="0D1225"/>
+          </a:solidFill>
+          <a:ln w="12700">
+            <a:solidFill>
+              <a:srgbClr val="0D1225"/>
+            </a:solidFill>
+            <a:prstDash val="solid"/>
+          </a:ln>
+        </p:spPr>
+      </p:sp>
+      <p:sp>
+        <p:nvSpPr>
+          <p:cNvPr id="5" name="Shape 3">
+            <a:extLst>
+              <a:ext uri="{FF2B5EF4-FFF2-40B4-BE49-F238E27FC236}">
+                <a16:creationId xmlns:a16="http://schemas.microsoft.com/office/drawing/2014/main" id="{ACA16B15-55A4-0E9D-A2EC-1FE43FACE5AF}"/>
+              </a:ext>
+            </a:extLst>
+          </p:cNvPr>
+          <p:cNvSpPr/>
+          <p:nvPr/>
+        </p:nvSpPr>
+        <p:spPr>
+          <a:xfrm>
+            <a:off x="0" y="0"/>
+            <a:ext cx="12192000" cy="36576"/>
+          </a:xfrm>
+          <a:prstGeom prst="rect">
+            <a:avLst/>
+          </a:prstGeom>
+          <a:solidFill>
+            <a:srgbClr val="6C63FF"/>
+          </a:solidFill>
+          <a:ln/>
+        </p:spPr>
+      </p:sp>
+      <p:sp>
+        <p:nvSpPr>
+          <p:cNvPr id="6" name="Shape 4">
+            <a:extLst>
+              <a:ext uri="{FF2B5EF4-FFF2-40B4-BE49-F238E27FC236}">
+                <a16:creationId xmlns:a16="http://schemas.microsoft.com/office/drawing/2014/main" id="{E1418EBB-918F-D0CF-677E-04CB4E0FF92D}"/>
+              </a:ext>
+            </a:extLst>
+          </p:cNvPr>
+          <p:cNvSpPr/>
+          <p:nvPr/>
+        </p:nvSpPr>
+        <p:spPr>
+          <a:xfrm>
+            <a:off x="274320" y="182880"/>
+            <a:ext cx="54864" cy="640080"/>
+          </a:xfrm>
+          <a:prstGeom prst="rect">
+            <a:avLst/>
+          </a:prstGeom>
+          <a:solidFill>
+            <a:srgbClr val="6C63FF"/>
+          </a:solidFill>
+          <a:ln/>
+        </p:spPr>
+      </p:sp>
+      <p:sp>
+        <p:nvSpPr>
+          <p:cNvPr id="7" name="Text 5">
+            <a:extLst>
+              <a:ext uri="{FF2B5EF4-FFF2-40B4-BE49-F238E27FC236}">
+                <a16:creationId xmlns:a16="http://schemas.microsoft.com/office/drawing/2014/main" id="{2D5FA05B-B8E1-A042-4B79-A5B6E2E55BFC}"/>
+              </a:ext>
+            </a:extLst>
+          </p:cNvPr>
+          <p:cNvSpPr/>
+          <p:nvPr/>
+        </p:nvSpPr>
+        <p:spPr>
+          <a:xfrm>
+            <a:off x="457200" y="137160"/>
+            <a:ext cx="10972800" cy="731520"/>
+          </a:xfrm>
+          <a:prstGeom prst="rect">
+            <a:avLst/>
+          </a:prstGeom>
+          <a:noFill/>
+          <a:ln/>
+        </p:spPr>
+        <p:txBody>
+          <a:bodyPr wrap="square" rtlCol="0" anchor="ctr"/>
+          <a:lstStyle/>
+          <a:p>
+            <a:pPr marL="0" indent="0">
+              <a:buNone/>
+            </a:pPr>
+            <a:r>
+              <a:rPr lang="en-US" sz="2800" b="1" dirty="0">
+                <a:solidFill>
+                  <a:srgbClr val="FFFFFF"/>
+                </a:solidFill>
+                <a:latin typeface="Segoe UI" pitchFamily="34" charset="0"/>
+                <a:ea typeface="Segoe UI" pitchFamily="34" charset="-122"/>
+                <a:cs typeface="Segoe UI" pitchFamily="34" charset="-120"/>
+              </a:rPr>
+              <a:t>RENTEASE</a:t>
+            </a:r>
+            <a:endParaRPr lang="en-US" sz="2800" dirty="0"/>
+          </a:p>
+        </p:txBody>
+      </p:sp>
+      <p:sp>
+        <p:nvSpPr>
+          <p:cNvPr id="8" name="Text 6">
+            <a:extLst>
+              <a:ext uri="{FF2B5EF4-FFF2-40B4-BE49-F238E27FC236}">
+                <a16:creationId xmlns:a16="http://schemas.microsoft.com/office/drawing/2014/main" id="{85C81A99-91CC-E21A-0BFF-C0878CD5747E}"/>
+              </a:ext>
+            </a:extLst>
+          </p:cNvPr>
+          <p:cNvSpPr/>
+          <p:nvPr/>
+        </p:nvSpPr>
+        <p:spPr>
+          <a:xfrm>
+            <a:off x="457200" y="777240"/>
+            <a:ext cx="10972800" cy="320040"/>
+          </a:xfrm>
+          <a:prstGeom prst="rect">
+            <a:avLst/>
+          </a:prstGeom>
+          <a:noFill/>
+          <a:ln/>
+        </p:spPr>
+        <p:txBody>
+          <a:bodyPr wrap="square" rtlCol="0" anchor="ctr"/>
+          <a:lstStyle/>
+          <a:p>
+            <a:pPr marL="0" indent="0">
+              <a:buNone/>
+            </a:pPr>
+            <a:r>
+              <a:rPr lang="en-US" sz="1300" dirty="0">
+                <a:solidFill>
+                  <a:srgbClr val="94A3B8"/>
+                </a:solidFill>
+                <a:latin typeface="Segoe UI" pitchFamily="34" charset="0"/>
+                <a:ea typeface="Segoe UI" pitchFamily="34" charset="-122"/>
+                <a:cs typeface="Segoe UI" pitchFamily="34" charset="-120"/>
+              </a:rPr>
+              <a:t>SMART RENTAL MANAGEMENT SYSTEM</a:t>
+            </a:r>
+            <a:endParaRPr lang="en-US" sz="1300" dirty="0"/>
+          </a:p>
+        </p:txBody>
+      </p:sp>
+      <p:sp>
+        <p:nvSpPr>
+          <p:cNvPr id="9" name="Shape 7">
+            <a:extLst>
+              <a:ext uri="{FF2B5EF4-FFF2-40B4-BE49-F238E27FC236}">
+                <a16:creationId xmlns:a16="http://schemas.microsoft.com/office/drawing/2014/main" id="{BBCE132F-2619-5FF3-1D07-41AB671DD8A9}"/>
+              </a:ext>
+            </a:extLst>
+          </p:cNvPr>
+          <p:cNvSpPr/>
+          <p:nvPr/>
+        </p:nvSpPr>
+        <p:spPr>
+          <a:xfrm>
+            <a:off x="1371600" y="1371600"/>
+            <a:ext cx="9445752" cy="263347"/>
+          </a:xfrm>
+          <a:prstGeom prst="rect">
+            <a:avLst/>
+          </a:prstGeom>
+          <a:solidFill>
+            <a:srgbClr val="475569"/>
+          </a:solidFill>
+          <a:ln/>
+        </p:spPr>
+      </p:sp>
+      <p:sp>
+        <p:nvSpPr>
+          <p:cNvPr id="10" name="Shape 8">
+            <a:extLst>
+              <a:ext uri="{FF2B5EF4-FFF2-40B4-BE49-F238E27FC236}">
+                <a16:creationId xmlns:a16="http://schemas.microsoft.com/office/drawing/2014/main" id="{5554A855-C3F3-3D55-573F-167749324EEA}"/>
+              </a:ext>
+            </a:extLst>
+          </p:cNvPr>
+          <p:cNvSpPr/>
+          <p:nvPr/>
+        </p:nvSpPr>
+        <p:spPr>
+          <a:xfrm>
+            <a:off x="6039612" y="1437437"/>
+            <a:ext cx="109728" cy="27432"/>
+          </a:xfrm>
+          <a:prstGeom prst="ellipse">
+            <a:avLst/>
+          </a:prstGeom>
+          <a:solidFill>
+            <a:srgbClr val="94A3B8"/>
+          </a:solidFill>
+          <a:ln/>
+        </p:spPr>
+      </p:sp>
+      <p:sp>
+        <p:nvSpPr>
+          <p:cNvPr id="11" name="Shape 9">
+            <a:extLst>
+              <a:ext uri="{FF2B5EF4-FFF2-40B4-BE49-F238E27FC236}">
+                <a16:creationId xmlns:a16="http://schemas.microsoft.com/office/drawing/2014/main" id="{057573BA-4EE9-27B9-9172-B32757EDBBEF}"/>
+              </a:ext>
+            </a:extLst>
+          </p:cNvPr>
+          <p:cNvSpPr/>
+          <p:nvPr/>
+        </p:nvSpPr>
+        <p:spPr>
+          <a:xfrm>
+            <a:off x="1371600" y="1634947"/>
+            <a:ext cx="9445752" cy="3862426"/>
+          </a:xfrm>
+          <a:prstGeom prst="rect">
+            <a:avLst/>
+          </a:prstGeom>
+          <a:solidFill>
+            <a:srgbClr val="111832"/>
+          </a:solidFill>
+          <a:ln w="12700">
+            <a:solidFill>
+              <a:srgbClr val="2D3561"/>
+            </a:solidFill>
+            <a:prstDash val="solid"/>
+          </a:ln>
+          <a:effectLst>
+            <a:outerShdw blurRad="190500" dist="63500" dir="16200000" algn="bl" rotWithShape="0">
+              <a:srgbClr val="6C63FF">
+                <a:alpha val="15000"/>
+              </a:srgbClr>
+            </a:outerShdw>
+          </a:effectLst>
+        </p:spPr>
+        <p:txBody>
+          <a:bodyPr/>
+          <a:lstStyle/>
+          <a:p>
+            <a:endParaRPr lang="en-US" dirty="0"/>
+          </a:p>
+        </p:txBody>
+      </p:sp>
+      <p:sp>
+        <p:nvSpPr>
+          <p:cNvPr id="12" name="Text 10">
+            <a:extLst>
+              <a:ext uri="{FF2B5EF4-FFF2-40B4-BE49-F238E27FC236}">
+                <a16:creationId xmlns:a16="http://schemas.microsoft.com/office/drawing/2014/main" id="{1BFD709F-4A75-9C56-718B-569204B42EB8}"/>
+              </a:ext>
+            </a:extLst>
+          </p:cNvPr>
+          <p:cNvSpPr/>
+          <p:nvPr/>
+        </p:nvSpPr>
+        <p:spPr>
+          <a:xfrm>
+            <a:off x="1371600" y="2468880"/>
+            <a:ext cx="9445752" cy="1755648"/>
+          </a:xfrm>
+          <a:prstGeom prst="rect">
+            <a:avLst/>
+          </a:prstGeom>
+          <a:noFill/>
+          <a:ln/>
+        </p:spPr>
+        <p:txBody>
+          <a:bodyPr wrap="square" rtlCol="0" anchor="ctr"/>
+          <a:lstStyle/>
+          <a:p>
+            <a:pPr marL="0" indent="0" algn="ctr">
+              <a:buNone/>
+            </a:pPr>
+            <a:r>
+              <a:rPr lang="en-US" sz="4400" b="1" dirty="0">
+                <a:solidFill>
+                  <a:schemeClr val="bg1">
+                    <a:lumMod val="95000"/>
+                  </a:schemeClr>
+                </a:solidFill>
+                <a:latin typeface="Perpetua Titling MT" panose="02020502060505020804" pitchFamily="18" charset="0"/>
+                <a:ea typeface="Segoe UI" pitchFamily="34" charset="-122"/>
+                <a:cs typeface="Segoe UI" pitchFamily="34" charset="-120"/>
+              </a:rPr>
+              <a:t>WORKING</a:t>
+            </a:r>
+            <a:endParaRPr lang="en-US" sz="4400" dirty="0">
+              <a:solidFill>
+                <a:schemeClr val="bg1">
+                  <a:lumMod val="95000"/>
+                </a:schemeClr>
+              </a:solidFill>
+              <a:latin typeface="Perpetua Titling MT" panose="02020502060505020804" pitchFamily="18" charset="0"/>
+            </a:endParaRPr>
+          </a:p>
+        </p:txBody>
+      </p:sp>
+      <p:sp>
+        <p:nvSpPr>
+          <p:cNvPr id="13" name="Shape 11">
+            <a:extLst>
+              <a:ext uri="{FF2B5EF4-FFF2-40B4-BE49-F238E27FC236}">
+                <a16:creationId xmlns:a16="http://schemas.microsoft.com/office/drawing/2014/main" id="{790AAF59-B69B-572F-5C70-4AA1217675A4}"/>
+              </a:ext>
+            </a:extLst>
+          </p:cNvPr>
+          <p:cNvSpPr/>
+          <p:nvPr/>
+        </p:nvSpPr>
+        <p:spPr>
+          <a:xfrm>
+            <a:off x="4205326" y="5497373"/>
+            <a:ext cx="3778301" cy="263347"/>
+          </a:xfrm>
+          <a:prstGeom prst="rect">
+            <a:avLst/>
+          </a:prstGeom>
+          <a:solidFill>
+            <a:srgbClr val="475569"/>
+          </a:solidFill>
+          <a:ln/>
+        </p:spPr>
+      </p:sp>
+      <p:sp>
+        <p:nvSpPr>
+          <p:cNvPr id="14" name="Text 12">
+            <a:extLst>
+              <a:ext uri="{FF2B5EF4-FFF2-40B4-BE49-F238E27FC236}">
+                <a16:creationId xmlns:a16="http://schemas.microsoft.com/office/drawing/2014/main" id="{51D6B9B2-7FEA-CB05-6827-581E39800575}"/>
+              </a:ext>
+            </a:extLst>
+          </p:cNvPr>
+          <p:cNvSpPr/>
+          <p:nvPr/>
+        </p:nvSpPr>
+        <p:spPr>
+          <a:xfrm>
+            <a:off x="1371600" y="1708099"/>
+            <a:ext cx="9445752" cy="320040"/>
+          </a:xfrm>
+          <a:prstGeom prst="rect">
+            <a:avLst/>
+          </a:prstGeom>
+          <a:noFill/>
+          <a:ln/>
+        </p:spPr>
+        <p:txBody>
+          <a:bodyPr wrap="square" rtlCol="0" anchor="ctr"/>
+          <a:lstStyle/>
+          <a:p>
+            <a:pPr marL="0" indent="0" algn="ctr">
+              <a:buNone/>
+            </a:pPr>
+            <a:endParaRPr lang="en-US" sz="1100" dirty="0"/>
+          </a:p>
+        </p:txBody>
+      </p:sp>
+      <p:sp>
+        <p:nvSpPr>
+          <p:cNvPr id="15" name="Shape 13">
+            <a:extLst>
+              <a:ext uri="{FF2B5EF4-FFF2-40B4-BE49-F238E27FC236}">
+                <a16:creationId xmlns:a16="http://schemas.microsoft.com/office/drawing/2014/main" id="{61F64B1B-A395-CB9D-7449-583148AAA2A4}"/>
+              </a:ext>
+            </a:extLst>
+          </p:cNvPr>
+          <p:cNvSpPr/>
+          <p:nvPr/>
+        </p:nvSpPr>
+        <p:spPr>
+          <a:xfrm>
+            <a:off x="274320" y="6035040"/>
+            <a:ext cx="1828800" cy="384048"/>
+          </a:xfrm>
+          <a:prstGeom prst="rect">
+            <a:avLst/>
+          </a:prstGeom>
+          <a:solidFill>
+            <a:srgbClr val="151B36"/>
+          </a:solidFill>
+          <a:ln w="12700">
+            <a:solidFill>
+              <a:srgbClr val="2D3561"/>
+            </a:solidFill>
+            <a:prstDash val="solid"/>
+          </a:ln>
+        </p:spPr>
+      </p:sp>
+      <p:sp>
+        <p:nvSpPr>
+          <p:cNvPr id="16" name="Text 14">
+            <a:extLst>
+              <a:ext uri="{FF2B5EF4-FFF2-40B4-BE49-F238E27FC236}">
+                <a16:creationId xmlns:a16="http://schemas.microsoft.com/office/drawing/2014/main" id="{7599E042-5664-FC32-75DC-5EAC42DD5904}"/>
+              </a:ext>
+            </a:extLst>
+          </p:cNvPr>
+          <p:cNvSpPr/>
+          <p:nvPr/>
+        </p:nvSpPr>
+        <p:spPr>
+          <a:xfrm>
+            <a:off x="274320" y="6035040"/>
+            <a:ext cx="1828800" cy="384048"/>
+          </a:xfrm>
+          <a:prstGeom prst="rect">
+            <a:avLst/>
+          </a:prstGeom>
+          <a:noFill/>
+          <a:ln/>
+        </p:spPr>
+        <p:txBody>
+          <a:bodyPr wrap="square" rtlCol="0" anchor="ctr"/>
+          <a:lstStyle/>
+          <a:p>
+            <a:pPr marL="0" indent="0" algn="ctr">
+              <a:buNone/>
+            </a:pPr>
+            <a:endParaRPr lang="en-US" sz="1000" dirty="0"/>
+          </a:p>
+        </p:txBody>
+      </p:sp>
+      <p:sp>
+        <p:nvSpPr>
+          <p:cNvPr id="17" name="Shape 15">
+            <a:extLst>
+              <a:ext uri="{FF2B5EF4-FFF2-40B4-BE49-F238E27FC236}">
+                <a16:creationId xmlns:a16="http://schemas.microsoft.com/office/drawing/2014/main" id="{E539CDF7-5B77-D611-A403-77A5C6A7C7CC}"/>
+              </a:ext>
+            </a:extLst>
+          </p:cNvPr>
+          <p:cNvSpPr/>
+          <p:nvPr/>
+        </p:nvSpPr>
+        <p:spPr>
+          <a:xfrm>
+            <a:off x="2212848" y="6035040"/>
+            <a:ext cx="1828800" cy="384048"/>
+          </a:xfrm>
+          <a:prstGeom prst="rect">
+            <a:avLst/>
+          </a:prstGeom>
+          <a:solidFill>
+            <a:srgbClr val="151B36"/>
+          </a:solidFill>
+          <a:ln w="12700">
+            <a:solidFill>
+              <a:srgbClr val="2D3561"/>
+            </a:solidFill>
+            <a:prstDash val="solid"/>
+          </a:ln>
+        </p:spPr>
+      </p:sp>
+      <p:sp>
+        <p:nvSpPr>
+          <p:cNvPr id="18" name="Text 16">
+            <a:extLst>
+              <a:ext uri="{FF2B5EF4-FFF2-40B4-BE49-F238E27FC236}">
+                <a16:creationId xmlns:a16="http://schemas.microsoft.com/office/drawing/2014/main" id="{C68CED5E-7A73-09A5-EEC4-249744B4DA4D}"/>
+              </a:ext>
+            </a:extLst>
+          </p:cNvPr>
+          <p:cNvSpPr/>
+          <p:nvPr/>
+        </p:nvSpPr>
+        <p:spPr>
+          <a:xfrm>
+            <a:off x="2212848" y="6035040"/>
+            <a:ext cx="1828800" cy="384048"/>
+          </a:xfrm>
+          <a:prstGeom prst="rect">
+            <a:avLst/>
+          </a:prstGeom>
+          <a:noFill/>
+          <a:ln/>
+        </p:spPr>
+        <p:txBody>
+          <a:bodyPr wrap="square" rtlCol="0" anchor="ctr"/>
+          <a:lstStyle/>
+          <a:p>
+            <a:pPr marL="0" indent="0" algn="ctr">
+              <a:buNone/>
+            </a:pPr>
+            <a:endParaRPr lang="en-US" sz="1000" dirty="0"/>
+          </a:p>
+        </p:txBody>
+      </p:sp>
+      <p:sp>
+        <p:nvSpPr>
+          <p:cNvPr id="19" name="Shape 17">
+            <a:extLst>
+              <a:ext uri="{FF2B5EF4-FFF2-40B4-BE49-F238E27FC236}">
+                <a16:creationId xmlns:a16="http://schemas.microsoft.com/office/drawing/2014/main" id="{E52915A7-8378-E708-F494-F886699D971D}"/>
+              </a:ext>
+            </a:extLst>
+          </p:cNvPr>
+          <p:cNvSpPr/>
+          <p:nvPr/>
+        </p:nvSpPr>
+        <p:spPr>
+          <a:xfrm>
+            <a:off x="4151376" y="6035040"/>
+            <a:ext cx="1828800" cy="384048"/>
+          </a:xfrm>
+          <a:prstGeom prst="rect">
+            <a:avLst/>
+          </a:prstGeom>
+          <a:solidFill>
+            <a:srgbClr val="151B36"/>
+          </a:solidFill>
+          <a:ln w="12700">
+            <a:solidFill>
+              <a:srgbClr val="2D3561"/>
+            </a:solidFill>
+            <a:prstDash val="solid"/>
+          </a:ln>
+        </p:spPr>
+      </p:sp>
+      <p:sp>
+        <p:nvSpPr>
+          <p:cNvPr id="20" name="Text 18">
+            <a:extLst>
+              <a:ext uri="{FF2B5EF4-FFF2-40B4-BE49-F238E27FC236}">
+                <a16:creationId xmlns:a16="http://schemas.microsoft.com/office/drawing/2014/main" id="{F8BD26AA-D6BE-5DC2-1B2B-60F2E04AC4B8}"/>
+              </a:ext>
+            </a:extLst>
+          </p:cNvPr>
+          <p:cNvSpPr/>
+          <p:nvPr/>
+        </p:nvSpPr>
+        <p:spPr>
+          <a:xfrm>
+            <a:off x="4151376" y="6035040"/>
+            <a:ext cx="1828800" cy="384048"/>
+          </a:xfrm>
+          <a:prstGeom prst="rect">
+            <a:avLst/>
+          </a:prstGeom>
+          <a:noFill/>
+          <a:ln/>
+        </p:spPr>
+        <p:txBody>
+          <a:bodyPr wrap="square" rtlCol="0" anchor="ctr"/>
+          <a:lstStyle/>
+          <a:p>
+            <a:pPr marL="0" indent="0" algn="ctr">
+              <a:buNone/>
+            </a:pPr>
+            <a:endParaRPr lang="en-US" sz="1000" dirty="0"/>
+          </a:p>
+        </p:txBody>
+      </p:sp>
+      <p:sp>
+        <p:nvSpPr>
+          <p:cNvPr id="21" name="Shape 19">
+            <a:extLst>
+              <a:ext uri="{FF2B5EF4-FFF2-40B4-BE49-F238E27FC236}">
+                <a16:creationId xmlns:a16="http://schemas.microsoft.com/office/drawing/2014/main" id="{A44F1F91-D89B-7BAD-82F5-01BFD4EC781D}"/>
+              </a:ext>
+            </a:extLst>
+          </p:cNvPr>
+          <p:cNvSpPr/>
+          <p:nvPr/>
+        </p:nvSpPr>
+        <p:spPr>
+          <a:xfrm>
+            <a:off x="6089904" y="6035040"/>
+            <a:ext cx="1828800" cy="384048"/>
+          </a:xfrm>
+          <a:prstGeom prst="rect">
+            <a:avLst/>
+          </a:prstGeom>
+          <a:solidFill>
+            <a:srgbClr val="151B36"/>
+          </a:solidFill>
+          <a:ln w="12700">
+            <a:solidFill>
+              <a:srgbClr val="2D3561"/>
+            </a:solidFill>
+            <a:prstDash val="solid"/>
+          </a:ln>
+        </p:spPr>
+      </p:sp>
+      <p:sp>
+        <p:nvSpPr>
+          <p:cNvPr id="22" name="Text 20">
+            <a:extLst>
+              <a:ext uri="{FF2B5EF4-FFF2-40B4-BE49-F238E27FC236}">
+                <a16:creationId xmlns:a16="http://schemas.microsoft.com/office/drawing/2014/main" id="{6376C5BD-A75B-9A8D-C34D-93DF56C060FF}"/>
+              </a:ext>
+            </a:extLst>
+          </p:cNvPr>
+          <p:cNvSpPr/>
+          <p:nvPr/>
+        </p:nvSpPr>
+        <p:spPr>
+          <a:xfrm>
+            <a:off x="6089904" y="6035040"/>
+            <a:ext cx="1828800" cy="384048"/>
+          </a:xfrm>
+          <a:prstGeom prst="rect">
+            <a:avLst/>
+          </a:prstGeom>
+          <a:noFill/>
+          <a:ln/>
+        </p:spPr>
+        <p:txBody>
+          <a:bodyPr wrap="square" rtlCol="0" anchor="ctr"/>
+          <a:lstStyle/>
+          <a:p>
+            <a:pPr marL="0" indent="0" algn="ctr">
+              <a:buNone/>
+            </a:pPr>
+            <a:endParaRPr lang="en-US" sz="1000" dirty="0"/>
+          </a:p>
+        </p:txBody>
+      </p:sp>
+      <p:sp>
+        <p:nvSpPr>
+          <p:cNvPr id="23" name="Shape 21">
+            <a:extLst>
+              <a:ext uri="{FF2B5EF4-FFF2-40B4-BE49-F238E27FC236}">
+                <a16:creationId xmlns:a16="http://schemas.microsoft.com/office/drawing/2014/main" id="{DB774341-0EF8-B6D8-E3D1-B23F81077FAB}"/>
+              </a:ext>
+            </a:extLst>
+          </p:cNvPr>
+          <p:cNvSpPr/>
+          <p:nvPr/>
+        </p:nvSpPr>
+        <p:spPr>
+          <a:xfrm>
+            <a:off x="8028432" y="6035040"/>
+            <a:ext cx="1828800" cy="384048"/>
+          </a:xfrm>
+          <a:prstGeom prst="rect">
+            <a:avLst/>
+          </a:prstGeom>
+          <a:solidFill>
+            <a:srgbClr val="151B36"/>
+          </a:solidFill>
+          <a:ln w="12700">
+            <a:solidFill>
+              <a:srgbClr val="2D3561"/>
+            </a:solidFill>
+            <a:prstDash val="solid"/>
+          </a:ln>
+        </p:spPr>
+      </p:sp>
+      <p:sp>
+        <p:nvSpPr>
+          <p:cNvPr id="24" name="Text 22">
+            <a:extLst>
+              <a:ext uri="{FF2B5EF4-FFF2-40B4-BE49-F238E27FC236}">
+                <a16:creationId xmlns:a16="http://schemas.microsoft.com/office/drawing/2014/main" id="{95632DDD-C794-0DB7-C87C-6E7D5FDD1679}"/>
+              </a:ext>
+            </a:extLst>
+          </p:cNvPr>
+          <p:cNvSpPr/>
+          <p:nvPr/>
+        </p:nvSpPr>
+        <p:spPr>
+          <a:xfrm>
+            <a:off x="8028432" y="6035040"/>
+            <a:ext cx="1828800" cy="384048"/>
+          </a:xfrm>
+          <a:prstGeom prst="rect">
+            <a:avLst/>
+          </a:prstGeom>
+          <a:noFill/>
+          <a:ln/>
+        </p:spPr>
+        <p:txBody>
+          <a:bodyPr wrap="square" rtlCol="0" anchor="ctr"/>
+          <a:lstStyle/>
+          <a:p>
+            <a:pPr marL="0" indent="0" algn="ctr">
+              <a:buNone/>
+            </a:pPr>
+            <a:endParaRPr lang="en-US" sz="1000" dirty="0"/>
+          </a:p>
+        </p:txBody>
+      </p:sp>
+      <p:sp>
+        <p:nvSpPr>
+          <p:cNvPr id="25" name="Shape 23">
+            <a:extLst>
+              <a:ext uri="{FF2B5EF4-FFF2-40B4-BE49-F238E27FC236}">
+                <a16:creationId xmlns:a16="http://schemas.microsoft.com/office/drawing/2014/main" id="{34B879F0-A4AD-51DC-1777-9899175C9B90}"/>
+              </a:ext>
+            </a:extLst>
+          </p:cNvPr>
+          <p:cNvSpPr/>
+          <p:nvPr/>
+        </p:nvSpPr>
+        <p:spPr>
+          <a:xfrm>
+            <a:off x="9966960" y="6035040"/>
+            <a:ext cx="1828800" cy="384048"/>
+          </a:xfrm>
+          <a:prstGeom prst="rect">
+            <a:avLst/>
+          </a:prstGeom>
+          <a:solidFill>
+            <a:srgbClr val="151B36"/>
+          </a:solidFill>
+          <a:ln w="12700">
+            <a:solidFill>
+              <a:srgbClr val="2D3561"/>
+            </a:solidFill>
+            <a:prstDash val="solid"/>
+          </a:ln>
+        </p:spPr>
+      </p:sp>
+      <p:sp>
+        <p:nvSpPr>
+          <p:cNvPr id="26" name="Text 24">
+            <a:extLst>
+              <a:ext uri="{FF2B5EF4-FFF2-40B4-BE49-F238E27FC236}">
+                <a16:creationId xmlns:a16="http://schemas.microsoft.com/office/drawing/2014/main" id="{619FAE67-6C89-BC1B-9436-6F92E67D0B8F}"/>
+              </a:ext>
+            </a:extLst>
+          </p:cNvPr>
+          <p:cNvSpPr/>
+          <p:nvPr/>
+        </p:nvSpPr>
+        <p:spPr>
+          <a:xfrm>
+            <a:off x="9966960" y="6035040"/>
+            <a:ext cx="1828800" cy="384048"/>
+          </a:xfrm>
+          <a:prstGeom prst="rect">
+            <a:avLst/>
+          </a:prstGeom>
+          <a:noFill/>
+          <a:ln/>
+        </p:spPr>
+        <p:txBody>
+          <a:bodyPr wrap="square" rtlCol="0" anchor="ctr"/>
+          <a:lstStyle/>
+          <a:p>
+            <a:pPr marL="0" indent="0" algn="ctr">
+              <a:buNone/>
+            </a:pPr>
+            <a:endParaRPr lang="en-US" sz="1000" dirty="0"/>
+          </a:p>
+        </p:txBody>
+      </p:sp>
+      <p:sp>
+        <p:nvSpPr>
+          <p:cNvPr id="27" name="TextBox 26">
+            <a:extLst>
+              <a:ext uri="{FF2B5EF4-FFF2-40B4-BE49-F238E27FC236}">
+                <a16:creationId xmlns:a16="http://schemas.microsoft.com/office/drawing/2014/main" id="{27B025DE-F912-79B2-8EDB-02731BF11C8D}"/>
+              </a:ext>
+            </a:extLst>
+          </p:cNvPr>
+          <p:cNvSpPr txBox="1"/>
+          <p:nvPr/>
+        </p:nvSpPr>
+        <p:spPr>
+          <a:xfrm>
+            <a:off x="4205326" y="1868119"/>
+            <a:ext cx="3120034" cy="369332"/>
+          </a:xfrm>
+          <a:prstGeom prst="rect">
+            <a:avLst/>
+          </a:prstGeom>
+          <a:noFill/>
+        </p:spPr>
+        <p:txBody>
+          <a:bodyPr wrap="square" rtlCol="0">
+            <a:spAutoFit/>
+          </a:bodyPr>
+          <a:lstStyle/>
+          <a:p>
+            <a:pPr algn="ctr"/>
+            <a:r>
+              <a:rPr lang="en-US" b="1" u="sng" dirty="0">
+                <a:solidFill>
+                  <a:schemeClr val="bg1">
+                    <a:lumMod val="95000"/>
+                  </a:schemeClr>
+                </a:solidFill>
+              </a:rPr>
+              <a:t>COMING TO ITS</a:t>
+            </a:r>
+          </a:p>
+        </p:txBody>
+      </p:sp>
+    </p:spTree>
+    <p:extLst>
+      <p:ext uri="{BB962C8B-B14F-4D97-AF65-F5344CB8AC3E}">
+        <p14:creationId xmlns:p14="http://schemas.microsoft.com/office/powerpoint/2010/main" val="2033238563"/>
+      </p:ext>
+    </p:extLst>
   </p:cSld>
   <p:clrMapOvr>
     <a:masterClrMapping/>
@@ -12173,7 +12815,7 @@
               <a:buNone/>
             </a:pPr>
             <a:r>
-              <a:rPr lang="en-US" sz="1500" b="1">
+              <a:rPr lang="en-US" sz="1500" b="1" dirty="0">
                 <a:solidFill>
                   <a:srgbClr val="E2E8F0"/>
                 </a:solidFill>
@@ -12183,7 +12825,7 @@
               </a:rPr>
               <a:t>System Architecture</a:t>
             </a:r>
-            <a:endParaRPr lang="en-US" sz="1500"/>
+            <a:endParaRPr lang="en-US" sz="1500" dirty="0"/>
           </a:p>
         </p:txBody>
       </p:sp>
@@ -12303,7 +12945,7 @@
               <a:buNone/>
             </a:pPr>
             <a:r>
-              <a:rPr lang="en-US" sz="1500" b="1">
+              <a:rPr lang="en-US" sz="1500" b="1" dirty="0">
                 <a:solidFill>
                   <a:srgbClr val="E2E8F0"/>
                 </a:solidFill>
@@ -12311,9 +12953,9 @@
                 <a:ea typeface="Segoe UI" pitchFamily="34" charset="-122"/>
                 <a:cs typeface="Segoe UI" pitchFamily="34" charset="-120"/>
               </a:rPr>
-              <a:t>Screenshots — Owner Panel</a:t>
-            </a:r>
-            <a:endParaRPr lang="en-US" sz="1500"/>
+              <a:t>Screenshots — Landing Page</a:t>
+            </a:r>
+            <a:endParaRPr lang="en-US" sz="1500" dirty="0"/>
           </a:p>
         </p:txBody>
       </p:sp>
@@ -12429,11 +13071,8 @@
           <a:bodyPr wrap="square" rtlCol="0" anchor="ctr"/>
           <a:lstStyle/>
           <a:p>
-            <a:pPr marL="0" indent="0">
-              <a:buNone/>
-            </a:pPr>
-            <a:r>
-              <a:rPr lang="en-US" sz="1500" b="1">
+            <a:r>
+              <a:rPr lang="en-US" sz="1500" b="1" dirty="0">
                 <a:solidFill>
                   <a:srgbClr val="E2E8F0"/>
                 </a:solidFill>
@@ -12441,9 +13080,9 @@
                 <a:ea typeface="Segoe UI" pitchFamily="34" charset="-122"/>
                 <a:cs typeface="Segoe UI" pitchFamily="34" charset="-120"/>
               </a:rPr>
-              <a:t>Screenshots — Tenant &amp; Payments</a:t>
-            </a:r>
-            <a:endParaRPr lang="en-US" sz="1500"/>
+              <a:t>Screenshots — Owner Panel</a:t>
+            </a:r>
+            <a:endParaRPr lang="en-US" sz="1500" dirty="0"/>
           </a:p>
         </p:txBody>
       </p:sp>
@@ -12478,6 +13117,13 @@
             </a:outerShdw>
           </a:effectLst>
         </p:spPr>
+        <p:txBody>
+          <a:bodyPr/>
+          <a:lstStyle/>
+          <a:p>
+            <a:endParaRPr lang="en-US"/>
+          </a:p>
+        </p:txBody>
       </p:sp>
       <p:sp>
         <p:nvSpPr>
@@ -12559,11 +13205,8 @@
           <a:bodyPr wrap="square" rtlCol="0" anchor="ctr"/>
           <a:lstStyle/>
           <a:p>
-            <a:pPr marL="0" indent="0">
-              <a:buNone/>
-            </a:pPr>
-            <a:r>
-              <a:rPr lang="en-US" sz="1500" b="1">
+            <a:r>
+              <a:rPr lang="en-US" sz="1500" b="1" dirty="0">
                 <a:solidFill>
                   <a:srgbClr val="E2E8F0"/>
                 </a:solidFill>
@@ -12571,9 +13214,9 @@
                 <a:ea typeface="Segoe UI" pitchFamily="34" charset="-122"/>
                 <a:cs typeface="Segoe UI" pitchFamily="34" charset="-120"/>
               </a:rPr>
-              <a:t>Screenshots — Search &amp; Notifications</a:t>
-            </a:r>
-            <a:endParaRPr lang="en-US" sz="1500"/>
+              <a:t>Screenshots — Tenant &amp; Payments</a:t>
+            </a:r>
+            <a:endParaRPr lang="en-US" sz="1500" dirty="0"/>
           </a:p>
         </p:txBody>
       </p:sp>
